--- a/docs/presentations/v3/aside-setup.pptx
+++ b/docs/presentations/v3/aside-setup.pptx
@@ -4,9 +4,6 @@
   <p:sldMasterIdLst>
     <p:sldMasterId id="2147483648" r:id="rId1"/>
   </p:sldMasterIdLst>
-  <p:notesMasterIdLst>
-    <p:notesMasterId r:id="rId15"/>
-  </p:notesMasterIdLst>
   <p:sldIdLst>
     <p:sldId id="256" r:id="rId2"/>
     <p:sldId id="257" r:id="rId3"/>
@@ -22,8 +19,11 @@
     <p:sldId id="267" r:id="rId13"/>
     <p:sldId id="268" r:id="rId14"/>
   </p:sldIdLst>
-  <p:sldSz cx="12192000" cy="6858000"/>
-  <p:notesSz cx="6858000" cy="12192000"/>
+  <p:notesMasterIdLst>
+    <p:notesMasterId r:id="rId15"/>
+  </p:notesMasterIdLst>
+  <p:sldSz cx="12191695" cy="6858000"/>
+  <p:notesSz cx="6858000" cy="12191695"/>
   <p:defaultTextStyle>
     <a:lvl1pPr marL="0" algn="l" defTabSz="914400" rtl="0" eaLnBrk="1" latinLnBrk="0" hangingPunct="1">
       <a:defRPr sz="1800" kern="1200">
@@ -116,11 +116,6 @@
       </a:defRPr>
     </a:lvl9pPr>
   </p:defaultTextStyle>
-  <p:extLst>
-    <p:ext uri="{EFAFB233-063F-42B5-8137-9DF3F51BA10A}">
-      <p15:sldGuideLst xmlns:p15="http://schemas.microsoft.com/office/powerpoint/2012/main"/>
-    </p:ext>
-  </p:extLst>
 </p:presentation>
 </file>
 
@@ -146,10 +141,234 @@
           <a:chExt cx="0" cy="0"/>
         </a:xfrm>
       </p:grpSpPr>
+      <p:sp>
+        <p:nvSpPr>
+          <p:cNvPr id="2" name="Header Placeholder 1"/>
+          <p:cNvSpPr>
+            <a:spLocks noGrp="1"/>
+          </p:cNvSpPr>
+          <p:nvPr>
+            <p:ph type="hdr" sz="quarter"/>
+          </p:nvPr>
+        </p:nvSpPr>
+        <p:spPr>
+          <a:xfrm>
+            <a:off x="0" y="0"/>
+            <a:ext cx="2971800" cy="458788"/>
+          </a:xfrm>
+          <a:prstGeom prst="rect">
+            <a:avLst/>
+          </a:prstGeom>
+        </p:spPr>
+        <p:txBody>
+          <a:bodyPr vert="horz" lIns="91440" tIns="45720" rIns="91440" bIns="45720" rtlCol="0"/>
+          <a:lstStyle>
+            <a:lvl1pPr algn="l">
+              <a:defRPr sz="1200"/>
+            </a:lvl1pPr>
+          </a:lstStyle>
+          <a:p>
+            <a:endParaRPr lang="en-US"/>
+          </a:p>
+        </p:txBody>
+      </p:sp>
+      <p:sp>
+        <p:nvSpPr>
+          <p:cNvPr id="3" name="Date Placeholder 2"/>
+          <p:cNvSpPr>
+            <a:spLocks noGrp="1"/>
+          </p:cNvSpPr>
+          <p:nvPr>
+            <p:ph type="dt" idx="1"/>
+          </p:nvPr>
+        </p:nvSpPr>
+        <p:spPr>
+          <a:xfrm>
+            <a:off x="3884613" y="0"/>
+            <a:ext cx="2971800" cy="458788"/>
+          </a:xfrm>
+          <a:prstGeom prst="rect">
+            <a:avLst/>
+          </a:prstGeom>
+        </p:spPr>
+        <p:txBody>
+          <a:bodyPr vert="horz" lIns="91440" tIns="45720" rIns="91440" bIns="45720" rtlCol="0"/>
+          <a:lstStyle>
+            <a:lvl1pPr algn="r">
+              <a:defRPr sz="1200"/>
+            </a:lvl1pPr>
+          </a:lstStyle>
+          <a:p>
+            <a:fld id="{5282F153-3F37-0F45-9E97-73ACFA13230C}" type="datetimeFigureOut">
+              <a:rPr lang="en-US"/>
+              <a:t>7/23/19</a:t>
+            </a:fld>
+            <a:endParaRPr lang="en-US"/>
+          </a:p>
+        </p:txBody>
+      </p:sp>
+      <p:sp>
+        <p:nvSpPr>
+          <p:cNvPr id="4" name="Slide Image Placeholder 3"/>
+          <p:cNvSpPr>
+            <a:spLocks noGrp="1" noRot="1" noChangeAspect="1"/>
+          </p:cNvSpPr>
+          <p:nvPr>
+            <p:ph type="sldImg" idx="2"/>
+          </p:nvPr>
+        </p:nvSpPr>
+        <p:spPr>
+          <a:xfrm>
+            <a:off x="685800" y="1143000"/>
+            <a:ext cx="5486400" cy="3086100"/>
+          </a:xfrm>
+          <a:prstGeom prst="rect">
+            <a:avLst/>
+          </a:prstGeom>
+          <a:noFill/>
+          <a:ln w="12700">
+            <a:solidFill>
+              <a:prstClr val="black"/>
+            </a:solidFill>
+          </a:ln>
+        </p:spPr>
+        <p:txBody>
+          <a:bodyPr vert="horz" lIns="91440" tIns="45720" rIns="91440" bIns="45720" rtlCol="0" anchor="ctr"/>
+          <a:lstStyle/>
+          <a:p>
+            <a:endParaRPr lang="en-US"/>
+          </a:p>
+        </p:txBody>
+      </p:sp>
+      <p:sp>
+        <p:nvSpPr>
+          <p:cNvPr id="5" name="Notes Placeholder 4"/>
+          <p:cNvSpPr>
+            <a:spLocks noGrp="1"/>
+          </p:cNvSpPr>
+          <p:nvPr>
+            <p:ph type="body" sz="quarter" idx="3"/>
+          </p:nvPr>
+        </p:nvSpPr>
+        <p:spPr>
+          <a:xfrm>
+            <a:off x="685800" y="4400550"/>
+            <a:ext cx="5486400" cy="3600450"/>
+          </a:xfrm>
+          <a:prstGeom prst="rect">
+            <a:avLst/>
+          </a:prstGeom>
+        </p:spPr>
+        <p:txBody>
+          <a:bodyPr vert="horz" lIns="91440" tIns="45720" rIns="91440" bIns="45720" rtlCol="0"/>
+          <a:lstStyle/>
+          <a:p>
+            <a:pPr lvl="0"/>
+            <a:r>
+              <a:rPr lang="en-US"/>
+              <a:t>Click to edit Master text styles</a:t>
+            </a:r>
+          </a:p>
+          <a:p>
+            <a:pPr lvl="1"/>
+            <a:r>
+              <a:rPr lang="en-US"/>
+              <a:t>Second level</a:t>
+            </a:r>
+          </a:p>
+          <a:p>
+            <a:pPr lvl="2"/>
+            <a:r>
+              <a:rPr lang="en-US"/>
+              <a:t>Third level</a:t>
+            </a:r>
+          </a:p>
+          <a:p>
+            <a:pPr lvl="3"/>
+            <a:r>
+              <a:rPr lang="en-US"/>
+              <a:t>Fourth level</a:t>
+            </a:r>
+          </a:p>
+          <a:p>
+            <a:pPr lvl="4"/>
+            <a:r>
+              <a:rPr lang="en-US"/>
+              <a:t>Fifth level</a:t>
+            </a:r>
+          </a:p>
+        </p:txBody>
+      </p:sp>
+      <p:sp>
+        <p:nvSpPr>
+          <p:cNvPr id="6" name="Footer Placeholder 5"/>
+          <p:cNvSpPr>
+            <a:spLocks noGrp="1"/>
+          </p:cNvSpPr>
+          <p:nvPr>
+            <p:ph type="ftr" sz="quarter" idx="4"/>
+          </p:nvPr>
+        </p:nvSpPr>
+        <p:spPr>
+          <a:xfrm>
+            <a:off x="0" y="8685213"/>
+            <a:ext cx="2971800" cy="458787"/>
+          </a:xfrm>
+          <a:prstGeom prst="rect">
+            <a:avLst/>
+          </a:prstGeom>
+        </p:spPr>
+        <p:txBody>
+          <a:bodyPr vert="horz" lIns="91440" tIns="45720" rIns="91440" bIns="45720" rtlCol="0" anchor="b"/>
+          <a:lstStyle>
+            <a:lvl1pPr algn="l">
+              <a:defRPr sz="1200"/>
+            </a:lvl1pPr>
+          </a:lstStyle>
+          <a:p>
+            <a:endParaRPr lang="en-US"/>
+          </a:p>
+        </p:txBody>
+      </p:sp>
+      <p:sp>
+        <p:nvSpPr>
+          <p:cNvPr id="7" name="Slide Number Placeholder 6"/>
+          <p:cNvSpPr>
+            <a:spLocks noGrp="1"/>
+          </p:cNvSpPr>
+          <p:nvPr>
+            <p:ph type="sldNum" sz="quarter" idx="5"/>
+          </p:nvPr>
+        </p:nvSpPr>
+        <p:spPr>
+          <a:xfrm>
+            <a:off x="3884613" y="8685213"/>
+            <a:ext cx="2971800" cy="458787"/>
+          </a:xfrm>
+          <a:prstGeom prst="rect">
+            <a:avLst/>
+          </a:prstGeom>
+        </p:spPr>
+        <p:txBody>
+          <a:bodyPr vert="horz" lIns="91440" tIns="45720" rIns="91440" bIns="45720" rtlCol="0" anchor="b"/>
+          <a:lstStyle>
+            <a:lvl1pPr algn="r">
+              <a:defRPr sz="1200"/>
+            </a:lvl1pPr>
+          </a:lstStyle>
+          <a:p>
+            <a:fld id="{CE5E9CC1-C706-0F49-92D6-E571CC5EEA8F}" type="slidenum">
+              <a:rPr lang="en-US"/>
+              <a:t>‹#›</a:t>
+            </a:fld>
+            <a:endParaRPr lang="en-US"/>
+          </a:p>
+        </p:txBody>
+      </p:sp>
     </p:spTree>
     <p:extLst>
       <p:ext uri="{BB962C8B-B14F-4D97-AF65-F5344CB8AC3E}">
-        <p14:creationId xmlns:p14="http://schemas.microsoft.com/office/powerpoint/2010/main" val="3082764684"/>
+        <p14:creationId xmlns:p14="http://schemas.microsoft.com/office/powerpoint/2010/main" val="1024086991"/>
       </p:ext>
     </p:extLst>
   </p:cSld>
@@ -293,6 +512,10 @@
           <a:bodyPr/>
           <a:lstStyle/>
           <a:p>
+            <a:r>
+              <a:rPr lang="en-US" dirty="0"/>
+              <a:t/>
+            </a:r>
             <a:endParaRPr lang="en-US" dirty="0"/>
           </a:p>
         </p:txBody>
@@ -377,6 +600,10 @@
           <a:bodyPr/>
           <a:lstStyle/>
           <a:p>
+            <a:r>
+              <a:rPr lang="en-US" dirty="0"/>
+              <a:t/>
+            </a:r>
             <a:endParaRPr lang="en-US" dirty="0"/>
           </a:p>
         </p:txBody>
@@ -461,6 +688,10 @@
           <a:bodyPr/>
           <a:lstStyle/>
           <a:p>
+            <a:r>
+              <a:rPr lang="en-US" dirty="0"/>
+              <a:t/>
+            </a:r>
             <a:endParaRPr lang="en-US" dirty="0"/>
           </a:p>
         </p:txBody>
@@ -545,6 +776,10 @@
           <a:bodyPr/>
           <a:lstStyle/>
           <a:p>
+            <a:r>
+              <a:rPr lang="en-US" dirty="0"/>
+              <a:t/>
+            </a:r>
             <a:endParaRPr lang="en-US" dirty="0"/>
           </a:p>
         </p:txBody>
@@ -629,6 +864,10 @@
           <a:bodyPr/>
           <a:lstStyle/>
           <a:p>
+            <a:r>
+              <a:rPr lang="en-US" dirty="0"/>
+              <a:t/>
+            </a:r>
             <a:endParaRPr lang="en-US" dirty="0"/>
           </a:p>
         </p:txBody>
@@ -713,6 +952,10 @@
           <a:bodyPr/>
           <a:lstStyle/>
           <a:p>
+            <a:r>
+              <a:rPr lang="en-US" dirty="0"/>
+              <a:t/>
+            </a:r>
             <a:endParaRPr lang="en-US" dirty="0"/>
           </a:p>
         </p:txBody>
@@ -797,6 +1040,10 @@
           <a:bodyPr/>
           <a:lstStyle/>
           <a:p>
+            <a:r>
+              <a:rPr lang="en-US" dirty="0"/>
+              <a:t/>
+            </a:r>
             <a:endParaRPr lang="en-US" dirty="0"/>
           </a:p>
         </p:txBody>
@@ -881,6 +1128,10 @@
           <a:bodyPr/>
           <a:lstStyle/>
           <a:p>
+            <a:r>
+              <a:rPr lang="en-US" dirty="0"/>
+              <a:t/>
+            </a:r>
             <a:endParaRPr lang="en-US" dirty="0"/>
           </a:p>
         </p:txBody>
@@ -965,6 +1216,10 @@
           <a:bodyPr/>
           <a:lstStyle/>
           <a:p>
+            <a:r>
+              <a:rPr lang="en-US" dirty="0"/>
+              <a:t/>
+            </a:r>
             <a:endParaRPr lang="en-US" dirty="0"/>
           </a:p>
         </p:txBody>
@@ -1049,6 +1304,10 @@
           <a:bodyPr/>
           <a:lstStyle/>
           <a:p>
+            <a:r>
+              <a:rPr lang="en-US" dirty="0"/>
+              <a:t/>
+            </a:r>
             <a:endParaRPr lang="en-US" dirty="0"/>
           </a:p>
         </p:txBody>
@@ -1133,6 +1392,10 @@
           <a:bodyPr/>
           <a:lstStyle/>
           <a:p>
+            <a:r>
+              <a:rPr lang="en-US" dirty="0"/>
+              <a:t/>
+            </a:r>
             <a:endParaRPr lang="en-US" dirty="0"/>
           </a:p>
         </p:txBody>
@@ -1217,6 +1480,10 @@
           <a:bodyPr/>
           <a:lstStyle/>
           <a:p>
+            <a:r>
+              <a:rPr lang="en-US" dirty="0"/>
+              <a:t/>
+            </a:r>
             <a:endParaRPr lang="en-US" dirty="0"/>
           </a:p>
         </p:txBody>
@@ -1301,6 +1568,10 @@
           <a:bodyPr/>
           <a:lstStyle/>
           <a:p>
+            <a:r>
+              <a:rPr lang="en-US" dirty="0"/>
+              <a:t/>
+            </a:r>
             <a:endParaRPr lang="en-US" dirty="0"/>
           </a:p>
         </p:txBody>
@@ -1374,11 +1645,6 @@
 <file path=ppt/slideMasters/slideMaster1.xml><?xml version="1.0" encoding="utf-8"?>
 <p:sldMaster xmlns:a="http://schemas.openxmlformats.org/drawingml/2006/main" xmlns:r="http://schemas.openxmlformats.org/officeDocument/2006/relationships" xmlns:p="http://schemas.openxmlformats.org/presentationml/2006/main">
   <p:cSld>
-    <p:bg>
-      <p:bgRef idx="1001">
-        <a:schemeClr val="bg1"/>
-      </p:bgRef>
-    </p:bg>
     <p:spTree>
       <p:nvGrpSpPr>
         <p:cNvPr id="1" name=""/>
@@ -1661,7 +1927,6 @@
         <a:solidFill>
           <a:srgbClr val="0B1F3A"/>
         </a:solidFill>
-        <a:effectLst/>
       </p:bgPr>
     </p:bg>
     <p:spTree>
@@ -1680,14 +1945,14 @@
       </p:grpSpPr>
       <p:pic>
         <p:nvPicPr>
-          <p:cNvPr id="2" name="Image 0" descr="/home/user/BasicRobotLessons/docs/presentations/v3/template/assets/logo/team5010-logo-onnavy.png"/>
+          <p:cNvPr id="2" name="Image 0" descr="/home/user/BasicRobotLessons/docs/presentations/v3/template/assets/logo/team5010-logo-onnavy.png">    </p:cNvPr>
           <p:cNvPicPr>
             <a:picLocks noChangeAspect="1"/>
           </p:cNvPicPr>
           <p:nvPr/>
         </p:nvPicPr>
         <p:blipFill>
-          <a:blip r:embed="rId3"/>
+          <a:blip r:embed="rId1"/>
           <a:stretch>
             <a:fillRect/>
           </a:stretch>
@@ -1723,11 +1988,11 @@
           <a:bodyPr wrap="square" lIns="0" tIns="0" rIns="0" bIns="0" rtlCol="0" anchor="ctr"/>
           <a:lstStyle/>
           <a:p>
-            <a:pPr marL="0" indent="0">
-              <a:buNone/>
-            </a:pPr>
-            <a:r>
-              <a:rPr lang="en-US" sz="2000" b="1" kern="0" spc="300" dirty="0">
+            <a:pPr indent="0" marL="0">
+              <a:buNone/>
+            </a:pPr>
+            <a:r>
+              <a:rPr lang="en-US" sz="2000" b="1" spc="300" kern="0" dirty="0">
                 <a:solidFill>
                   <a:srgbClr val="1B9AAA"/>
                 </a:solidFill>
@@ -1762,11 +2027,11 @@
           <a:bodyPr wrap="square" lIns="0" tIns="0" rIns="0" bIns="0" rtlCol="0" anchor="ctr"/>
           <a:lstStyle/>
           <a:p>
-            <a:pPr marL="0" indent="0">
-              <a:buNone/>
-            </a:pPr>
-            <a:r>
-              <a:rPr lang="en-US" sz="2200" b="1" kern="0" spc="200" dirty="0">
+            <a:pPr indent="0" marL="0">
+              <a:buNone/>
+            </a:pPr>
+            <a:r>
+              <a:rPr lang="en-US" sz="2200" b="1" spc="200" kern="0" dirty="0">
                 <a:solidFill>
                   <a:srgbClr val="FF5010"/>
                 </a:solidFill>
@@ -1801,7 +2066,7 @@
           <a:bodyPr wrap="square" lIns="0" tIns="0" rIns="0" bIns="0" rtlCol="0" anchor="ctr"/>
           <a:lstStyle/>
           <a:p>
-            <a:pPr marL="0" indent="0">
+            <a:pPr indent="0" marL="0">
               <a:buNone/>
             </a:pPr>
             <a:r>
@@ -1827,7 +2092,7 @@
         </p:nvSpPr>
         <p:spPr>
           <a:xfrm>
-            <a:off x="777240" y="3383280"/>
+            <a:off x="777240" y="3611880"/>
             <a:ext cx="8686800" cy="640080"/>
           </a:xfrm>
           <a:prstGeom prst="rect">
@@ -1840,7 +2105,7 @@
           <a:bodyPr wrap="square" lIns="0" tIns="0" rIns="0" bIns="0" rtlCol="0" anchor="ctr"/>
           <a:lstStyle/>
           <a:p>
-            <a:pPr marL="0" indent="0">
+            <a:pPr indent="0" marL="0">
               <a:buNone/>
             </a:pPr>
             <a:r>
@@ -1879,11 +2144,11 @@
           <a:bodyPr wrap="square" lIns="0" tIns="0" rIns="0" bIns="0" rtlCol="0" anchor="ctr"/>
           <a:lstStyle/>
           <a:p>
-            <a:pPr marL="0" indent="0">
-              <a:buNone/>
-            </a:pPr>
-            <a:r>
-              <a:rPr lang="en-US" sz="2000" kern="0" spc="100" dirty="0">
+            <a:pPr indent="0" marL="0">
+              <a:buNone/>
+            </a:pPr>
+            <a:r>
+              <a:rPr lang="en-US" sz="2000" spc="100" kern="0" dirty="0">
                 <a:solidFill>
                   <a:srgbClr val="89A0BE"/>
                 </a:solidFill>
@@ -1913,7 +2178,6 @@
         <a:solidFill>
           <a:srgbClr val="FFFFFF"/>
         </a:solidFill>
-        <a:effectLst/>
       </p:bgPr>
     </p:bg>
     <p:spTree>
@@ -1949,24 +2213,17 @@
           </a:solidFill>
           <a:ln/>
         </p:spPr>
-        <p:txBody>
-          <a:bodyPr/>
-          <a:lstStyle/>
-          <a:p>
-            <a:endParaRPr lang="en-US"/>
-          </a:p>
-        </p:txBody>
       </p:sp>
       <p:pic>
         <p:nvPicPr>
-          <p:cNvPr id="3" name="Image 0" descr="/home/user/BasicRobotLessons/docs/presentations/v3/template/assets/icons/clouduploadalt_white.png"/>
+          <p:cNvPr id="3" name="Image 0" descr="/home/user/BasicRobotLessons/docs/presentations/v3/template/assets/icons/clouduploadalt_white.png">    </p:cNvPr>
           <p:cNvPicPr>
             <a:picLocks noChangeAspect="1"/>
           </p:cNvPicPr>
           <p:nvPr/>
         </p:nvPicPr>
         <p:blipFill>
-          <a:blip r:embed="rId3"/>
+          <a:blip r:embed="rId1"/>
           <a:stretch>
             <a:fillRect/>
           </a:stretch>
@@ -2002,11 +2259,11 @@
           <a:bodyPr wrap="square" lIns="0" tIns="0" rIns="0" bIns="0" rtlCol="0" anchor="ctr"/>
           <a:lstStyle/>
           <a:p>
-            <a:pPr marL="0" indent="0">
-              <a:buNone/>
-            </a:pPr>
-            <a:r>
-              <a:rPr lang="en-US" sz="2000" b="1" kern="0" spc="150" dirty="0">
+            <a:pPr indent="0" marL="0">
+              <a:buNone/>
+            </a:pPr>
+            <a:r>
+              <a:rPr lang="en-US" sz="2000" b="1" spc="150" kern="0" dirty="0">
                 <a:solidFill>
                   <a:srgbClr val="FF5010"/>
                 </a:solidFill>
@@ -2028,20 +2285,20 @@
         </p:nvSpPr>
         <p:spPr>
           <a:xfrm>
-            <a:off x="1371600" y="749808"/>
-            <a:ext cx="9418320" cy="594360"/>
-          </a:xfrm>
-          <a:prstGeom prst="rect">
-            <a:avLst/>
-          </a:prstGeom>
-          <a:noFill/>
-          <a:ln/>
-        </p:spPr>
-        <p:txBody>
-          <a:bodyPr wrap="square" lIns="0" tIns="0" rIns="0" bIns="0" rtlCol="0" anchor="ctr"/>
-          <a:lstStyle/>
-          <a:p>
-            <a:pPr marL="0" indent="0">
+            <a:off x="1371600" y="818388"/>
+            <a:ext cx="10149840" cy="502920"/>
+          </a:xfrm>
+          <a:prstGeom prst="rect">
+            <a:avLst/>
+          </a:prstGeom>
+          <a:noFill/>
+          <a:ln/>
+        </p:spPr>
+        <p:txBody>
+          <a:bodyPr wrap="square" lIns="0" tIns="0" rIns="0" bIns="0" rtlCol="0" anchor="t"/>
+          <a:lstStyle/>
+          <a:p>
+            <a:pPr indent="0" marL="0">
               <a:buNone/>
             </a:pPr>
             <a:r>
@@ -2080,20 +2337,13 @@
           </a:solidFill>
           <a:ln/>
           <a:effectLst>
-            <a:outerShdw blurRad="101600" dist="38100" dir="5400000" algn="bl" rotWithShape="0">
+            <a:outerShdw sx="100000" sy="100000" kx="0" ky="0" algn="bl" rotWithShape="0" blurRad="101600" dist="38100" dir="5400000">
               <a:srgbClr val="0B1F3A">
                 <a:alpha val="35000"/>
               </a:srgbClr>
             </a:outerShdw>
           </a:effectLst>
         </p:spPr>
-        <p:txBody>
-          <a:bodyPr/>
-          <a:lstStyle/>
-          <a:p>
-            <a:endParaRPr lang="en-US"/>
-          </a:p>
-        </p:txBody>
       </p:sp>
       <p:sp>
         <p:nvSpPr>
@@ -2114,13 +2364,6 @@
           </a:solidFill>
           <a:ln/>
         </p:spPr>
-        <p:txBody>
-          <a:bodyPr/>
-          <a:lstStyle/>
-          <a:p>
-            <a:endParaRPr lang="en-US"/>
-          </a:p>
-        </p:txBody>
       </p:sp>
       <p:sp>
         <p:nvSpPr>
@@ -2141,13 +2384,6 @@
           </a:solidFill>
           <a:ln/>
         </p:spPr>
-        <p:txBody>
-          <a:bodyPr/>
-          <a:lstStyle/>
-          <a:p>
-            <a:endParaRPr lang="en-US"/>
-          </a:p>
-        </p:txBody>
       </p:sp>
       <p:sp>
         <p:nvSpPr>
@@ -2168,13 +2404,6 @@
           </a:solidFill>
           <a:ln/>
         </p:spPr>
-        <p:txBody>
-          <a:bodyPr/>
-          <a:lstStyle/>
-          <a:p>
-            <a:endParaRPr lang="en-US"/>
-          </a:p>
-        </p:txBody>
       </p:sp>
       <p:sp>
         <p:nvSpPr>
@@ -2197,7 +2426,7 @@
           <a:bodyPr wrap="square" lIns="0" tIns="0" rIns="0" bIns="0" rtlCol="0" anchor="t"/>
           <a:lstStyle/>
           <a:p>
-            <a:pPr marL="0" indent="0">
+            <a:pPr indent="0" marL="0">
               <a:lnSpc>
                 <a:spcPct val="120000"/>
               </a:lnSpc>
@@ -2239,13 +2468,6 @@
           </a:solidFill>
           <a:ln/>
         </p:spPr>
-        <p:txBody>
-          <a:bodyPr/>
-          <a:lstStyle/>
-          <a:p>
-            <a:endParaRPr lang="en-US"/>
-          </a:p>
-        </p:txBody>
       </p:sp>
       <p:sp>
         <p:nvSpPr>
@@ -2268,7 +2490,7 @@
           <a:bodyPr wrap="square" lIns="0" tIns="0" rIns="0" bIns="0" rtlCol="0" anchor="t"/>
           <a:lstStyle/>
           <a:p>
-            <a:pPr marL="0" indent="0">
+            <a:pPr indent="0" marL="0">
               <a:lnSpc>
                 <a:spcPct val="120000"/>
               </a:lnSpc>
@@ -2310,7 +2532,7 @@
           <a:bodyPr wrap="square" lIns="0" tIns="0" rIns="0" bIns="0" rtlCol="0" anchor="t"/>
           <a:lstStyle/>
           <a:p>
-            <a:pPr marL="0" indent="0">
+            <a:pPr indent="0" marL="0">
               <a:lnSpc>
                 <a:spcPct val="125000"/>
               </a:lnSpc>
@@ -2352,11 +2574,11 @@
           <a:bodyPr wrap="square" lIns="0" tIns="0" rIns="0" bIns="0" rtlCol="0" anchor="ctr"/>
           <a:lstStyle/>
           <a:p>
-            <a:pPr marL="0" indent="0">
-              <a:buNone/>
-            </a:pPr>
-            <a:r>
-              <a:rPr lang="en-US" sz="2000" kern="0" spc="100" dirty="0">
+            <a:pPr indent="0" marL="0">
+              <a:buNone/>
+            </a:pPr>
+            <a:r>
+              <a:rPr lang="en-US" sz="2000" spc="100" kern="0" dirty="0">
                 <a:solidFill>
                   <a:srgbClr val="5B6B84"/>
                 </a:solidFill>
@@ -2391,7 +2613,7 @@
           <a:bodyPr wrap="square" lIns="0" tIns="0" rIns="0" bIns="0" rtlCol="0" anchor="ctr"/>
           <a:lstStyle/>
           <a:p>
-            <a:pPr marL="0" indent="0" algn="r">
+            <a:pPr algn="r" indent="0" marL="0">
               <a:buNone/>
             </a:pPr>
             <a:r>
@@ -2411,14 +2633,14 @@
       </p:sp>
       <p:pic>
         <p:nvPicPr>
-          <p:cNvPr id="16" name="Image 1" descr="/home/user/BasicRobotLessons/docs/presentations/v3/template/assets/logo/team5010-logo-onwhite.png"/>
+          <p:cNvPr id="16" name="Image 1" descr="/home/user/BasicRobotLessons/docs/presentations/v3/template/assets/logo/team5010-logo-onwhite.png">    </p:cNvPr>
           <p:cNvPicPr>
             <a:picLocks noChangeAspect="1"/>
           </p:cNvPicPr>
           <p:nvPr/>
         </p:nvPicPr>
         <p:blipFill>
-          <a:blip r:embed="rId4"/>
+          <a:blip r:embed="rId2"/>
           <a:stretch>
             <a:fillRect/>
           </a:stretch>
@@ -2449,7 +2671,6 @@
         <a:solidFill>
           <a:srgbClr val="0B1F3A"/>
         </a:solidFill>
-        <a:effectLst/>
       </p:bgPr>
     </p:bg>
     <p:spTree>
@@ -2485,24 +2706,17 @@
           </a:solidFill>
           <a:ln/>
         </p:spPr>
-        <p:txBody>
-          <a:bodyPr/>
-          <a:lstStyle/>
-          <a:p>
-            <a:endParaRPr lang="en-US"/>
-          </a:p>
-        </p:txBody>
       </p:sp>
       <p:pic>
         <p:nvPicPr>
-          <p:cNvPr id="3" name="Image 0" descr="/home/user/BasicRobotLessons/docs/presentations/v3/template/assets/icons/syncalt_white.png"/>
+          <p:cNvPr id="3" name="Image 0" descr="/home/user/BasicRobotLessons/docs/presentations/v3/template/assets/icons/syncalt_white.png">    </p:cNvPr>
           <p:cNvPicPr>
             <a:picLocks noChangeAspect="1"/>
           </p:cNvPicPr>
           <p:nvPr/>
         </p:nvPicPr>
         <p:blipFill>
-          <a:blip r:embed="rId3"/>
+          <a:blip r:embed="rId1"/>
           <a:stretch>
             <a:fillRect/>
           </a:stretch>
@@ -2538,11 +2752,11 @@
           <a:bodyPr wrap="square" lIns="0" tIns="0" rIns="0" bIns="0" rtlCol="0" anchor="ctr"/>
           <a:lstStyle/>
           <a:p>
-            <a:pPr marL="0" indent="0">
-              <a:buNone/>
-            </a:pPr>
-            <a:r>
-              <a:rPr lang="en-US" sz="2000" b="1" kern="0" spc="100" dirty="0">
+            <a:pPr indent="0" marL="0">
+              <a:buNone/>
+            </a:pPr>
+            <a:r>
+              <a:rPr lang="en-US" sz="2000" b="1" spc="100" kern="0" dirty="0">
                 <a:solidFill>
                   <a:srgbClr val="1B9AAA"/>
                 </a:solidFill>
@@ -2564,20 +2778,20 @@
         </p:nvSpPr>
         <p:spPr>
           <a:xfrm>
-            <a:off x="1371600" y="749808"/>
-            <a:ext cx="9418320" cy="594360"/>
-          </a:xfrm>
-          <a:prstGeom prst="rect">
-            <a:avLst/>
-          </a:prstGeom>
-          <a:noFill/>
-          <a:ln/>
-        </p:spPr>
-        <p:txBody>
-          <a:bodyPr wrap="square" lIns="0" tIns="0" rIns="0" bIns="0" rtlCol="0" anchor="ctr"/>
-          <a:lstStyle/>
-          <a:p>
-            <a:pPr marL="0" indent="0">
+            <a:off x="1371600" y="818388"/>
+            <a:ext cx="10149840" cy="502920"/>
+          </a:xfrm>
+          <a:prstGeom prst="rect">
+            <a:avLst/>
+          </a:prstGeom>
+          <a:noFill/>
+          <a:ln/>
+        </p:spPr>
+        <p:txBody>
+          <a:bodyPr wrap="square" lIns="0" tIns="0" rIns="0" bIns="0" rtlCol="0" anchor="t"/>
+          <a:lstStyle/>
+          <a:p>
+            <a:pPr indent="0" marL="0">
               <a:buNone/>
             </a:pPr>
             <a:r>
@@ -2616,20 +2830,13 @@
           </a:solidFill>
           <a:ln/>
           <a:effectLst>
-            <a:outerShdw blurRad="101600" dist="38100" dir="5400000" algn="bl" rotWithShape="0">
+            <a:outerShdw sx="100000" sy="100000" kx="0" ky="0" algn="bl" rotWithShape="0" blurRad="101600" dist="38100" dir="5400000">
               <a:srgbClr val="0B1F3A">
                 <a:alpha val="35000"/>
               </a:srgbClr>
             </a:outerShdw>
           </a:effectLst>
         </p:spPr>
-        <p:txBody>
-          <a:bodyPr/>
-          <a:lstStyle/>
-          <a:p>
-            <a:endParaRPr lang="en-US"/>
-          </a:p>
-        </p:txBody>
       </p:sp>
       <p:sp>
         <p:nvSpPr>
@@ -2650,13 +2857,6 @@
           </a:solidFill>
           <a:ln/>
         </p:spPr>
-        <p:txBody>
-          <a:bodyPr/>
-          <a:lstStyle/>
-          <a:p>
-            <a:endParaRPr lang="en-US"/>
-          </a:p>
-        </p:txBody>
       </p:sp>
       <p:sp>
         <p:nvSpPr>
@@ -2677,13 +2877,6 @@
           </a:solidFill>
           <a:ln/>
         </p:spPr>
-        <p:txBody>
-          <a:bodyPr/>
-          <a:lstStyle/>
-          <a:p>
-            <a:endParaRPr lang="en-US"/>
-          </a:p>
-        </p:txBody>
       </p:sp>
       <p:sp>
         <p:nvSpPr>
@@ -2704,13 +2897,6 @@
           </a:solidFill>
           <a:ln/>
         </p:spPr>
-        <p:txBody>
-          <a:bodyPr/>
-          <a:lstStyle/>
-          <a:p>
-            <a:endParaRPr lang="en-US"/>
-          </a:p>
-        </p:txBody>
       </p:sp>
       <p:sp>
         <p:nvSpPr>
@@ -2733,7 +2919,7 @@
           <a:bodyPr wrap="square" lIns="0" tIns="0" rIns="0" bIns="0" rtlCol="0" anchor="t"/>
           <a:lstStyle/>
           <a:p>
-            <a:pPr marL="0" indent="0">
+            <a:pPr indent="0" marL="0">
               <a:lnSpc>
                 <a:spcPct val="120000"/>
               </a:lnSpc>
@@ -2753,7 +2939,7 @@
             <a:endParaRPr lang="en-US" sz="1800" dirty="0"/>
           </a:p>
           <a:p>
-            <a:pPr marL="0" indent="0">
+            <a:pPr indent="0" marL="0">
               <a:lnSpc>
                 <a:spcPct val="120000"/>
               </a:lnSpc>
@@ -2773,7 +2959,7 @@
             <a:endParaRPr lang="en-US" sz="1800" dirty="0"/>
           </a:p>
           <a:p>
-            <a:pPr marL="0" indent="0">
+            <a:pPr indent="0" marL="0">
               <a:lnSpc>
                 <a:spcPct val="120000"/>
               </a:lnSpc>
@@ -2793,7 +2979,7 @@
             <a:endParaRPr lang="en-US" sz="1800" dirty="0"/>
           </a:p>
           <a:p>
-            <a:pPr marL="0" indent="0">
+            <a:pPr indent="0" marL="0">
               <a:lnSpc>
                 <a:spcPct val="120000"/>
               </a:lnSpc>
@@ -2813,7 +2999,7 @@
             <a:endParaRPr lang="en-US" sz="1800" dirty="0"/>
           </a:p>
           <a:p>
-            <a:pPr marL="0" indent="0">
+            <a:pPr indent="0" marL="0">
               <a:lnSpc>
                 <a:spcPct val="120000"/>
               </a:lnSpc>
@@ -2822,7 +3008,7 @@
             <a:endParaRPr lang="en-US" sz="1800" dirty="0"/>
           </a:p>
           <a:p>
-            <a:pPr marL="0" indent="0">
+            <a:pPr indent="0" marL="0">
               <a:lnSpc>
                 <a:spcPct val="120000"/>
               </a:lnSpc>
@@ -2864,13 +3050,6 @@
           </a:solidFill>
           <a:ln/>
         </p:spPr>
-        <p:txBody>
-          <a:bodyPr/>
-          <a:lstStyle/>
-          <a:p>
-            <a:endParaRPr lang="en-US"/>
-          </a:p>
-        </p:txBody>
       </p:sp>
       <p:sp>
         <p:nvSpPr>
@@ -2893,7 +3072,7 @@
           <a:bodyPr wrap="square" lIns="0" tIns="0" rIns="0" bIns="0" rtlCol="0" anchor="t"/>
           <a:lstStyle/>
           <a:p>
-            <a:pPr marL="0" indent="0">
+            <a:pPr indent="0" marL="0">
               <a:lnSpc>
                 <a:spcPct val="115000"/>
               </a:lnSpc>
@@ -2935,7 +3114,7 @@
           <a:bodyPr wrap="square" lIns="0" tIns="0" rIns="0" bIns="0" rtlCol="0" anchor="t"/>
           <a:lstStyle/>
           <a:p>
-            <a:pPr marL="0" indent="0">
+            <a:pPr indent="0" marL="0">
               <a:lnSpc>
                 <a:spcPct val="125000"/>
               </a:lnSpc>
@@ -2977,13 +3156,6 @@
           </a:solidFill>
           <a:ln/>
         </p:spPr>
-        <p:txBody>
-          <a:bodyPr/>
-          <a:lstStyle/>
-          <a:p>
-            <a:endParaRPr lang="en-US"/>
-          </a:p>
-        </p:txBody>
       </p:sp>
       <p:sp>
         <p:nvSpPr>
@@ -3006,7 +3178,7 @@
           <a:bodyPr wrap="square" lIns="0" tIns="0" rIns="0" bIns="0" rtlCol="0" anchor="ctr"/>
           <a:lstStyle/>
           <a:p>
-            <a:pPr marL="0" indent="0">
+            <a:pPr indent="0" marL="0">
               <a:lnSpc>
                 <a:spcPct val="125000"/>
               </a:lnSpc>
@@ -3048,11 +3220,11 @@
           <a:bodyPr wrap="square" lIns="0" tIns="0" rIns="0" bIns="0" rtlCol="0" anchor="ctr"/>
           <a:lstStyle/>
           <a:p>
-            <a:pPr marL="0" indent="0">
-              <a:buNone/>
-            </a:pPr>
-            <a:r>
-              <a:rPr lang="en-US" sz="2000" kern="0" spc="100" dirty="0">
+            <a:pPr indent="0" marL="0">
+              <a:buNone/>
+            </a:pPr>
+            <a:r>
+              <a:rPr lang="en-US" sz="2000" spc="100" kern="0" dirty="0">
                 <a:solidFill>
                   <a:srgbClr val="7A93B8"/>
                 </a:solidFill>
@@ -3087,7 +3259,7 @@
           <a:bodyPr wrap="square" lIns="0" tIns="0" rIns="0" bIns="0" rtlCol="0" anchor="ctr"/>
           <a:lstStyle/>
           <a:p>
-            <a:pPr marL="0" indent="0" algn="r">
+            <a:pPr algn="r" indent="0" marL="0">
               <a:buNone/>
             </a:pPr>
             <a:r>
@@ -3107,14 +3279,14 @@
       </p:sp>
       <p:pic>
         <p:nvPicPr>
-          <p:cNvPr id="18" name="Image 1" descr="/home/user/BasicRobotLessons/docs/presentations/v3/template/assets/logo/team5010-logo-onnavy.png"/>
+          <p:cNvPr id="18" name="Image 1" descr="/home/user/BasicRobotLessons/docs/presentations/v3/template/assets/logo/team5010-logo-onnavy.png">    </p:cNvPr>
           <p:cNvPicPr>
             <a:picLocks noChangeAspect="1"/>
           </p:cNvPicPr>
           <p:nvPr/>
         </p:nvPicPr>
         <p:blipFill>
-          <a:blip r:embed="rId4"/>
+          <a:blip r:embed="rId2"/>
           <a:stretch>
             <a:fillRect/>
           </a:stretch>
@@ -3145,7 +3317,6 @@
         <a:solidFill>
           <a:srgbClr val="0B1F3A"/>
         </a:solidFill>
-        <a:effectLst/>
       </p:bgPr>
     </p:bg>
     <p:spTree>
@@ -3181,24 +3352,17 @@
           </a:solidFill>
           <a:ln/>
         </p:spPr>
-        <p:txBody>
-          <a:bodyPr/>
-          <a:lstStyle/>
-          <a:p>
-            <a:endParaRPr lang="en-US"/>
-          </a:p>
-        </p:txBody>
       </p:sp>
       <p:pic>
         <p:nvPicPr>
-          <p:cNvPr id="3" name="Image 0" descr="/home/user/BasicRobotLessons/docs/presentations/v3/template/assets/icons/clipboardcheck_white.png"/>
+          <p:cNvPr id="3" name="Image 0" descr="/home/user/BasicRobotLessons/docs/presentations/v3/template/assets/icons/clipboardcheck_white.png">    </p:cNvPr>
           <p:cNvPicPr>
             <a:picLocks noChangeAspect="1"/>
           </p:cNvPicPr>
           <p:nvPr/>
         </p:nvPicPr>
         <p:blipFill>
-          <a:blip r:embed="rId3"/>
+          <a:blip r:embed="rId1"/>
           <a:stretch>
             <a:fillRect/>
           </a:stretch>
@@ -3234,11 +3398,11 @@
           <a:bodyPr wrap="square" lIns="0" tIns="0" rIns="0" bIns="0" rtlCol="0" anchor="ctr"/>
           <a:lstStyle/>
           <a:p>
-            <a:pPr marL="0" indent="0">
-              <a:buNone/>
-            </a:pPr>
-            <a:r>
-              <a:rPr lang="en-US" sz="2000" b="1" kern="0" spc="100" dirty="0">
+            <a:pPr indent="0" marL="0">
+              <a:buNone/>
+            </a:pPr>
+            <a:r>
+              <a:rPr lang="en-US" sz="2000" b="1" spc="100" kern="0" dirty="0">
                 <a:solidFill>
                   <a:srgbClr val="1B9AAA"/>
                 </a:solidFill>
@@ -3260,20 +3424,20 @@
         </p:nvSpPr>
         <p:spPr>
           <a:xfrm>
-            <a:off x="1371600" y="749808"/>
-            <a:ext cx="9418320" cy="594360"/>
-          </a:xfrm>
-          <a:prstGeom prst="rect">
-            <a:avLst/>
-          </a:prstGeom>
-          <a:noFill/>
-          <a:ln/>
-        </p:spPr>
-        <p:txBody>
-          <a:bodyPr wrap="square" lIns="0" tIns="0" rIns="0" bIns="0" rtlCol="0" anchor="ctr"/>
-          <a:lstStyle/>
-          <a:p>
-            <a:pPr marL="0" indent="0">
+            <a:off x="1371600" y="818388"/>
+            <a:ext cx="10149840" cy="502920"/>
+          </a:xfrm>
+          <a:prstGeom prst="rect">
+            <a:avLst/>
+          </a:prstGeom>
+          <a:noFill/>
+          <a:ln/>
+        </p:spPr>
+        <p:txBody>
+          <a:bodyPr wrap="square" lIns="0" tIns="0" rIns="0" bIns="0" rtlCol="0" anchor="t"/>
+          <a:lstStyle/>
+          <a:p>
+            <a:pPr indent="0" marL="0">
               <a:buNone/>
             </a:pPr>
             <a:r>
@@ -3312,13 +3476,6 @@
           </a:solidFill>
           <a:ln/>
         </p:spPr>
-        <p:txBody>
-          <a:bodyPr/>
-          <a:lstStyle/>
-          <a:p>
-            <a:endParaRPr lang="en-US"/>
-          </a:p>
-        </p:txBody>
       </p:sp>
       <p:sp>
         <p:nvSpPr>
@@ -3339,13 +3496,6 @@
           </a:solidFill>
           <a:ln/>
         </p:spPr>
-        <p:txBody>
-          <a:bodyPr/>
-          <a:lstStyle/>
-          <a:p>
-            <a:endParaRPr lang="en-US"/>
-          </a:p>
-        </p:txBody>
       </p:sp>
       <p:sp>
         <p:nvSpPr>
@@ -3368,7 +3518,7 @@
           <a:bodyPr wrap="square" lIns="0" tIns="0" rIns="0" bIns="0" rtlCol="0" anchor="ctr"/>
           <a:lstStyle/>
           <a:p>
-            <a:pPr marL="0" indent="0" algn="ctr">
+            <a:pPr algn="ctr" indent="0" marL="0">
               <a:buNone/>
             </a:pPr>
             <a:r>
@@ -3407,7 +3557,7 @@
           <a:bodyPr wrap="square" lIns="0" tIns="0" rIns="0" bIns="0" rtlCol="0" anchor="ctr"/>
           <a:lstStyle/>
           <a:p>
-            <a:pPr marL="0" indent="0">
+            <a:pPr indent="0" marL="0">
               <a:lnSpc>
                 <a:spcPct val="110000"/>
               </a:lnSpc>
@@ -3449,7 +3599,7 @@
           <a:bodyPr wrap="square" lIns="0" tIns="0" rIns="0" bIns="0" rtlCol="0" anchor="t"/>
           <a:lstStyle/>
           <a:p>
-            <a:pPr marL="0" indent="0">
+            <a:pPr indent="0" marL="0">
               <a:lnSpc>
                 <a:spcPct val="125000"/>
               </a:lnSpc>
@@ -3491,13 +3641,6 @@
           </a:solidFill>
           <a:ln/>
         </p:spPr>
-        <p:txBody>
-          <a:bodyPr/>
-          <a:lstStyle/>
-          <a:p>
-            <a:endParaRPr lang="en-US"/>
-          </a:p>
-        </p:txBody>
       </p:sp>
       <p:sp>
         <p:nvSpPr>
@@ -3518,13 +3661,6 @@
           </a:solidFill>
           <a:ln/>
         </p:spPr>
-        <p:txBody>
-          <a:bodyPr/>
-          <a:lstStyle/>
-          <a:p>
-            <a:endParaRPr lang="en-US"/>
-          </a:p>
-        </p:txBody>
       </p:sp>
       <p:sp>
         <p:nvSpPr>
@@ -3547,7 +3683,7 @@
           <a:bodyPr wrap="square" lIns="0" tIns="0" rIns="0" bIns="0" rtlCol="0" anchor="ctr"/>
           <a:lstStyle/>
           <a:p>
-            <a:pPr marL="0" indent="0" algn="ctr">
+            <a:pPr algn="ctr" indent="0" marL="0">
               <a:buNone/>
             </a:pPr>
             <a:r>
@@ -3586,7 +3722,7 @@
           <a:bodyPr wrap="square" lIns="0" tIns="0" rIns="0" bIns="0" rtlCol="0" anchor="ctr"/>
           <a:lstStyle/>
           <a:p>
-            <a:pPr marL="0" indent="0">
+            <a:pPr indent="0" marL="0">
               <a:lnSpc>
                 <a:spcPct val="110000"/>
               </a:lnSpc>
@@ -3628,7 +3764,7 @@
           <a:bodyPr wrap="square" lIns="0" tIns="0" rIns="0" bIns="0" rtlCol="0" anchor="t"/>
           <a:lstStyle/>
           <a:p>
-            <a:pPr marL="0" indent="0">
+            <a:pPr indent="0" marL="0">
               <a:lnSpc>
                 <a:spcPct val="125000"/>
               </a:lnSpc>
@@ -3670,13 +3806,6 @@
           </a:solidFill>
           <a:ln/>
         </p:spPr>
-        <p:txBody>
-          <a:bodyPr/>
-          <a:lstStyle/>
-          <a:p>
-            <a:endParaRPr lang="en-US"/>
-          </a:p>
-        </p:txBody>
       </p:sp>
       <p:sp>
         <p:nvSpPr>
@@ -3697,13 +3826,6 @@
           </a:solidFill>
           <a:ln/>
         </p:spPr>
-        <p:txBody>
-          <a:bodyPr/>
-          <a:lstStyle/>
-          <a:p>
-            <a:endParaRPr lang="en-US"/>
-          </a:p>
-        </p:txBody>
       </p:sp>
       <p:sp>
         <p:nvSpPr>
@@ -3726,7 +3848,7 @@
           <a:bodyPr wrap="square" lIns="0" tIns="0" rIns="0" bIns="0" rtlCol="0" anchor="ctr"/>
           <a:lstStyle/>
           <a:p>
-            <a:pPr marL="0" indent="0" algn="ctr">
+            <a:pPr algn="ctr" indent="0" marL="0">
               <a:buNone/>
             </a:pPr>
             <a:r>
@@ -3765,7 +3887,7 @@
           <a:bodyPr wrap="square" lIns="0" tIns="0" rIns="0" bIns="0" rtlCol="0" anchor="ctr"/>
           <a:lstStyle/>
           <a:p>
-            <a:pPr marL="0" indent="0">
+            <a:pPr indent="0" marL="0">
               <a:lnSpc>
                 <a:spcPct val="110000"/>
               </a:lnSpc>
@@ -3807,7 +3929,7 @@
           <a:bodyPr wrap="square" lIns="0" tIns="0" rIns="0" bIns="0" rtlCol="0" anchor="t"/>
           <a:lstStyle/>
           <a:p>
-            <a:pPr marL="0" indent="0">
+            <a:pPr indent="0" marL="0">
               <a:lnSpc>
                 <a:spcPct val="125000"/>
               </a:lnSpc>
@@ -3849,13 +3971,6 @@
           </a:solidFill>
           <a:ln/>
         </p:spPr>
-        <p:txBody>
-          <a:bodyPr/>
-          <a:lstStyle/>
-          <a:p>
-            <a:endParaRPr lang="en-US"/>
-          </a:p>
-        </p:txBody>
       </p:sp>
       <p:sp>
         <p:nvSpPr>
@@ -3876,13 +3991,6 @@
           </a:solidFill>
           <a:ln/>
         </p:spPr>
-        <p:txBody>
-          <a:bodyPr/>
-          <a:lstStyle/>
-          <a:p>
-            <a:endParaRPr lang="en-US"/>
-          </a:p>
-        </p:txBody>
       </p:sp>
       <p:sp>
         <p:nvSpPr>
@@ -3905,7 +4013,7 @@
           <a:bodyPr wrap="square" lIns="0" tIns="0" rIns="0" bIns="0" rtlCol="0" anchor="ctr"/>
           <a:lstStyle/>
           <a:p>
-            <a:pPr marL="0" indent="0" algn="ctr">
+            <a:pPr algn="ctr" indent="0" marL="0">
               <a:buNone/>
             </a:pPr>
             <a:r>
@@ -3944,7 +4052,7 @@
           <a:bodyPr wrap="square" lIns="0" tIns="0" rIns="0" bIns="0" rtlCol="0" anchor="ctr"/>
           <a:lstStyle/>
           <a:p>
-            <a:pPr marL="0" indent="0">
+            <a:pPr indent="0" marL="0">
               <a:lnSpc>
                 <a:spcPct val="110000"/>
               </a:lnSpc>
@@ -3986,7 +4094,7 @@
           <a:bodyPr wrap="square" lIns="0" tIns="0" rIns="0" bIns="0" rtlCol="0" anchor="t"/>
           <a:lstStyle/>
           <a:p>
-            <a:pPr marL="0" indent="0">
+            <a:pPr indent="0" marL="0">
               <a:lnSpc>
                 <a:spcPct val="125000"/>
               </a:lnSpc>
@@ -4028,11 +4136,11 @@
           <a:bodyPr wrap="square" lIns="0" tIns="0" rIns="0" bIns="0" rtlCol="0" anchor="ctr"/>
           <a:lstStyle/>
           <a:p>
-            <a:pPr marL="0" indent="0">
-              <a:buNone/>
-            </a:pPr>
-            <a:r>
-              <a:rPr lang="en-US" sz="2000" kern="0" spc="100" dirty="0">
+            <a:pPr indent="0" marL="0">
+              <a:buNone/>
+            </a:pPr>
+            <a:r>
+              <a:rPr lang="en-US" sz="2000" spc="100" kern="0" dirty="0">
                 <a:solidFill>
                   <a:srgbClr val="7A93B8"/>
                 </a:solidFill>
@@ -4067,7 +4175,7 @@
           <a:bodyPr wrap="square" lIns="0" tIns="0" rIns="0" bIns="0" rtlCol="0" anchor="ctr"/>
           <a:lstStyle/>
           <a:p>
-            <a:pPr marL="0" indent="0" algn="r">
+            <a:pPr algn="r" indent="0" marL="0">
               <a:buNone/>
             </a:pPr>
             <a:r>
@@ -4087,14 +4195,14 @@
       </p:sp>
       <p:pic>
         <p:nvPicPr>
-          <p:cNvPr id="28" name="Image 1" descr="/home/user/BasicRobotLessons/docs/presentations/v3/template/assets/logo/team5010-logo-onnavy.png"/>
+          <p:cNvPr id="28" name="Image 1" descr="/home/user/BasicRobotLessons/docs/presentations/v3/template/assets/logo/team5010-logo-onnavy.png">    </p:cNvPr>
           <p:cNvPicPr>
             <a:picLocks noChangeAspect="1"/>
           </p:cNvPicPr>
           <p:nvPr/>
         </p:nvPicPr>
         <p:blipFill>
-          <a:blip r:embed="rId4"/>
+          <a:blip r:embed="rId2"/>
           <a:stretch>
             <a:fillRect/>
           </a:stretch>
@@ -4125,7 +4233,6 @@
         <a:solidFill>
           <a:srgbClr val="FFFFFF"/>
         </a:solidFill>
-        <a:effectLst/>
       </p:bgPr>
     </p:bg>
     <p:spTree>
@@ -4161,24 +4268,17 @@
           </a:solidFill>
           <a:ln/>
         </p:spPr>
-        <p:txBody>
-          <a:bodyPr/>
-          <a:lstStyle/>
-          <a:p>
-            <a:endParaRPr lang="en-US"/>
-          </a:p>
-        </p:txBody>
       </p:sp>
       <p:pic>
         <p:nvPicPr>
-          <p:cNvPr id="3" name="Image 0" descr="/home/user/BasicRobotLessons/docs/presentations/v3/template/assets/icons/graduationcap_white.png"/>
+          <p:cNvPr id="3" name="Image 0" descr="/home/user/BasicRobotLessons/docs/presentations/v3/template/assets/icons/graduationcap_white.png">    </p:cNvPr>
           <p:cNvPicPr>
             <a:picLocks noChangeAspect="1"/>
           </p:cNvPicPr>
           <p:nvPr/>
         </p:nvPicPr>
         <p:blipFill>
-          <a:blip r:embed="rId3"/>
+          <a:blip r:embed="rId1"/>
           <a:stretch>
             <a:fillRect/>
           </a:stretch>
@@ -4214,11 +4314,11 @@
           <a:bodyPr wrap="square" lIns="0" tIns="0" rIns="0" bIns="0" rtlCol="0" anchor="ctr"/>
           <a:lstStyle/>
           <a:p>
-            <a:pPr marL="0" indent="0">
-              <a:buNone/>
-            </a:pPr>
-            <a:r>
-              <a:rPr lang="en-US" sz="2000" b="1" kern="0" spc="150" dirty="0">
+            <a:pPr indent="0" marL="0">
+              <a:buNone/>
+            </a:pPr>
+            <a:r>
+              <a:rPr lang="en-US" sz="2000" b="1" spc="150" kern="0" dirty="0">
                 <a:solidFill>
                   <a:srgbClr val="FF5010"/>
                 </a:solidFill>
@@ -4240,20 +4340,20 @@
         </p:nvSpPr>
         <p:spPr>
           <a:xfrm>
-            <a:off x="1371600" y="749808"/>
-            <a:ext cx="9418320" cy="594360"/>
-          </a:xfrm>
-          <a:prstGeom prst="rect">
-            <a:avLst/>
-          </a:prstGeom>
-          <a:noFill/>
-          <a:ln/>
-        </p:spPr>
-        <p:txBody>
-          <a:bodyPr wrap="square" lIns="0" tIns="0" rIns="0" bIns="0" rtlCol="0" anchor="ctr"/>
-          <a:lstStyle/>
-          <a:p>
-            <a:pPr marL="0" indent="0">
+            <a:off x="1371600" y="818388"/>
+            <a:ext cx="10149840" cy="502920"/>
+          </a:xfrm>
+          <a:prstGeom prst="rect">
+            <a:avLst/>
+          </a:prstGeom>
+          <a:noFill/>
+          <a:ln/>
+        </p:spPr>
+        <p:txBody>
+          <a:bodyPr wrap="square" lIns="0" tIns="0" rIns="0" bIns="0" rtlCol="0" anchor="t"/>
+          <a:lstStyle/>
+          <a:p>
+            <a:pPr indent="0" marL="0">
               <a:buNone/>
             </a:pPr>
             <a:r>
@@ -4386,7 +4486,7 @@
           <a:bodyPr wrap="square" lIns="0" tIns="0" rIns="0" bIns="0" rtlCol="0" anchor="t"/>
           <a:lstStyle/>
           <a:p>
-            <a:pPr marL="0" indent="0">
+            <a:pPr indent="0" marL="0">
               <a:lnSpc>
                 <a:spcPct val="125000"/>
               </a:lnSpc>
@@ -4428,13 +4528,6 @@
           </a:solidFill>
           <a:ln/>
         </p:spPr>
-        <p:txBody>
-          <a:bodyPr/>
-          <a:lstStyle/>
-          <a:p>
-            <a:endParaRPr lang="en-US"/>
-          </a:p>
-        </p:txBody>
       </p:sp>
       <p:sp>
         <p:nvSpPr>
@@ -4457,11 +4550,11 @@
           <a:bodyPr wrap="square" lIns="0" tIns="0" rIns="0" bIns="0" rtlCol="0" anchor="ctr"/>
           <a:lstStyle/>
           <a:p>
-            <a:pPr marL="0" indent="0">
-              <a:buNone/>
-            </a:pPr>
-            <a:r>
-              <a:rPr lang="en-US" sz="2000" b="1" kern="0" spc="120" dirty="0">
+            <a:pPr indent="0" marL="0">
+              <a:buNone/>
+            </a:pPr>
+            <a:r>
+              <a:rPr lang="en-US" sz="2000" b="1" spc="120" kern="0" dirty="0">
                 <a:solidFill>
                   <a:srgbClr val="1B9AAA"/>
                 </a:solidFill>
@@ -4496,7 +4589,7 @@
           <a:bodyPr wrap="square" lIns="0" tIns="0" rIns="0" bIns="0" rtlCol="0" anchor="ctr"/>
           <a:lstStyle/>
           <a:p>
-            <a:pPr marL="0" indent="0">
+            <a:pPr indent="0" marL="0">
               <a:buNone/>
             </a:pPr>
             <a:r>
@@ -4535,7 +4628,7 @@
           <a:bodyPr wrap="square" lIns="0" tIns="0" rIns="0" bIns="0" rtlCol="0" anchor="ctr"/>
           <a:lstStyle/>
           <a:p>
-            <a:pPr marL="0" indent="0">
+            <a:pPr indent="0" marL="0">
               <a:buNone/>
             </a:pPr>
             <a:r>
@@ -4574,7 +4667,7 @@
           <a:bodyPr wrap="square" lIns="0" tIns="0" rIns="0" bIns="0" rtlCol="0" anchor="t"/>
           <a:lstStyle/>
           <a:p>
-            <a:pPr marL="0" indent="0">
+            <a:pPr indent="0" marL="0">
               <a:lnSpc>
                 <a:spcPct val="130000"/>
               </a:lnSpc>
@@ -4614,24 +4707,17 @@
           </a:solidFill>
           <a:ln/>
         </p:spPr>
-        <p:txBody>
-          <a:bodyPr/>
-          <a:lstStyle/>
-          <a:p>
-            <a:endParaRPr lang="en-US"/>
-          </a:p>
-        </p:txBody>
       </p:sp>
       <p:pic>
         <p:nvPicPr>
-          <p:cNvPr id="14" name="Image 1" descr="/home/user/BasicRobotLessons/docs/presentations/v3/template/assets/icons/arrowright_white.png"/>
+          <p:cNvPr id="14" name="Image 1" descr="/home/user/BasicRobotLessons/docs/presentations/v3/template/assets/icons/arrowright_white.png">    </p:cNvPr>
           <p:cNvPicPr>
             <a:picLocks noChangeAspect="1"/>
           </p:cNvPicPr>
           <p:nvPr/>
         </p:nvPicPr>
         <p:blipFill>
-          <a:blip r:embed="rId4"/>
+          <a:blip r:embed="rId2"/>
           <a:stretch>
             <a:fillRect/>
           </a:stretch>
@@ -4667,11 +4753,11 @@
           <a:bodyPr wrap="square" lIns="0" tIns="0" rIns="0" bIns="0" rtlCol="0" anchor="ctr"/>
           <a:lstStyle/>
           <a:p>
-            <a:pPr marL="0" indent="0">
-              <a:buNone/>
-            </a:pPr>
-            <a:r>
-              <a:rPr lang="en-US" sz="2000" kern="0" spc="100" dirty="0">
+            <a:pPr indent="0" marL="0">
+              <a:buNone/>
+            </a:pPr>
+            <a:r>
+              <a:rPr lang="en-US" sz="2000" spc="100" kern="0" dirty="0">
                 <a:solidFill>
                   <a:srgbClr val="5B6B84"/>
                 </a:solidFill>
@@ -4706,7 +4792,7 @@
           <a:bodyPr wrap="square" lIns="0" tIns="0" rIns="0" bIns="0" rtlCol="0" anchor="ctr"/>
           <a:lstStyle/>
           <a:p>
-            <a:pPr marL="0" indent="0" algn="r">
+            <a:pPr algn="r" indent="0" marL="0">
               <a:buNone/>
             </a:pPr>
             <a:r>
@@ -4726,14 +4812,14 @@
       </p:sp>
       <p:pic>
         <p:nvPicPr>
-          <p:cNvPr id="17" name="Image 2" descr="/home/user/BasicRobotLessons/docs/presentations/v3/template/assets/logo/team5010-logo-onwhite.png"/>
+          <p:cNvPr id="17" name="Image 2" descr="/home/user/BasicRobotLessons/docs/presentations/v3/template/assets/logo/team5010-logo-onwhite.png">    </p:cNvPr>
           <p:cNvPicPr>
             <a:picLocks noChangeAspect="1"/>
           </p:cNvPicPr>
           <p:nvPr/>
         </p:nvPicPr>
         <p:blipFill>
-          <a:blip r:embed="rId5"/>
+          <a:blip r:embed="rId3"/>
           <a:stretch>
             <a:fillRect/>
           </a:stretch>
@@ -4764,7 +4850,6 @@
         <a:solidFill>
           <a:srgbClr val="FFFFFF"/>
         </a:solidFill>
-        <a:effectLst/>
       </p:bgPr>
     </p:bg>
     <p:spTree>
@@ -4800,24 +4885,17 @@
           </a:solidFill>
           <a:ln/>
         </p:spPr>
-        <p:txBody>
-          <a:bodyPr/>
-          <a:lstStyle/>
-          <a:p>
-            <a:endParaRPr lang="en-US"/>
-          </a:p>
-        </p:txBody>
       </p:sp>
       <p:pic>
         <p:nvPicPr>
-          <p:cNvPr id="3" name="Image 0" descr="/home/user/BasicRobotLessons/docs/presentations/v3/template/assets/icons/bullseye_white.png"/>
+          <p:cNvPr id="3" name="Image 0" descr="/home/user/BasicRobotLessons/docs/presentations/v3/template/assets/icons/bullseye_white.png">    </p:cNvPr>
           <p:cNvPicPr>
             <a:picLocks noChangeAspect="1"/>
           </p:cNvPicPr>
           <p:nvPr/>
         </p:nvPicPr>
         <p:blipFill>
-          <a:blip r:embed="rId3"/>
+          <a:blip r:embed="rId1"/>
           <a:stretch>
             <a:fillRect/>
           </a:stretch>
@@ -4853,11 +4931,11 @@
           <a:bodyPr wrap="square" lIns="0" tIns="0" rIns="0" bIns="0" rtlCol="0" anchor="ctr"/>
           <a:lstStyle/>
           <a:p>
-            <a:pPr marL="0" indent="0">
-              <a:buNone/>
-            </a:pPr>
-            <a:r>
-              <a:rPr lang="en-US" sz="2000" b="1" kern="0" spc="150" dirty="0">
+            <a:pPr indent="0" marL="0">
+              <a:buNone/>
+            </a:pPr>
+            <a:r>
+              <a:rPr lang="en-US" sz="2000" b="1" spc="150" kern="0" dirty="0">
                 <a:solidFill>
                   <a:srgbClr val="FF5010"/>
                 </a:solidFill>
@@ -4879,20 +4957,20 @@
         </p:nvSpPr>
         <p:spPr>
           <a:xfrm>
-            <a:off x="1371600" y="749808"/>
-            <a:ext cx="9418320" cy="594360"/>
-          </a:xfrm>
-          <a:prstGeom prst="rect">
-            <a:avLst/>
-          </a:prstGeom>
-          <a:noFill/>
-          <a:ln/>
-        </p:spPr>
-        <p:txBody>
-          <a:bodyPr wrap="square" lIns="0" tIns="0" rIns="0" bIns="0" rtlCol="0" anchor="ctr"/>
-          <a:lstStyle/>
-          <a:p>
-            <a:pPr marL="0" indent="0">
+            <a:off x="1371600" y="818388"/>
+            <a:ext cx="10149840" cy="502920"/>
+          </a:xfrm>
+          <a:prstGeom prst="rect">
+            <a:avLst/>
+          </a:prstGeom>
+          <a:noFill/>
+          <a:ln/>
+        </p:spPr>
+        <p:txBody>
+          <a:bodyPr wrap="square" lIns="0" tIns="0" rIns="0" bIns="0" rtlCol="0" anchor="t"/>
+          <a:lstStyle/>
+          <a:p>
+            <a:pPr indent="0" marL="0">
               <a:buNone/>
             </a:pPr>
             <a:r>
@@ -4931,13 +5009,6 @@
           </a:solidFill>
           <a:ln/>
         </p:spPr>
-        <p:txBody>
-          <a:bodyPr/>
-          <a:lstStyle/>
-          <a:p>
-            <a:endParaRPr lang="en-US"/>
-          </a:p>
-        </p:txBody>
       </p:sp>
       <p:sp>
         <p:nvSpPr>
@@ -4960,7 +5031,7 @@
           <a:bodyPr wrap="square" lIns="0" tIns="0" rIns="0" bIns="0" rtlCol="0" anchor="ctr"/>
           <a:lstStyle/>
           <a:p>
-            <a:pPr marL="0" indent="0">
+            <a:pPr indent="0" marL="0">
               <a:lnSpc>
                 <a:spcPct val="125000"/>
               </a:lnSpc>
@@ -5000,24 +5071,17 @@
           </a:solidFill>
           <a:ln/>
         </p:spPr>
-        <p:txBody>
-          <a:bodyPr/>
-          <a:lstStyle/>
-          <a:p>
-            <a:endParaRPr lang="en-US"/>
-          </a:p>
-        </p:txBody>
       </p:sp>
       <p:pic>
         <p:nvPicPr>
-          <p:cNvPr id="9" name="Image 1" descr="/home/user/BasicRobotLessons/docs/presentations/v3/template/assets/icons/terminal_white.png"/>
+          <p:cNvPr id="9" name="Image 1" descr="/home/user/BasicRobotLessons/docs/presentations/v3/template/assets/icons/terminal_white.png">    </p:cNvPr>
           <p:cNvPicPr>
             <a:picLocks noChangeAspect="1"/>
           </p:cNvPicPr>
           <p:nvPr/>
         </p:nvPicPr>
         <p:blipFill>
-          <a:blip r:embed="rId4"/>
+          <a:blip r:embed="rId2"/>
           <a:stretch>
             <a:fillRect/>
           </a:stretch>
@@ -5053,11 +5117,11 @@
           <a:bodyPr wrap="square" lIns="0" tIns="0" rIns="0" bIns="0" rtlCol="0" anchor="ctr"/>
           <a:lstStyle/>
           <a:p>
-            <a:pPr marL="0" indent="0">
-              <a:buNone/>
-            </a:pPr>
-            <a:r>
-              <a:rPr lang="en-US" sz="2000" b="1" kern="0" spc="50" dirty="0">
+            <a:pPr indent="0" marL="0">
+              <a:buNone/>
+            </a:pPr>
+            <a:r>
+              <a:rPr lang="en-US" sz="2000" b="1" spc="50" kern="0" dirty="0">
                 <a:solidFill>
                   <a:srgbClr val="13294B"/>
                 </a:solidFill>
@@ -5184,24 +5248,17 @@
           </a:solidFill>
           <a:ln/>
         </p:spPr>
-        <p:txBody>
-          <a:bodyPr/>
-          <a:lstStyle/>
-          <a:p>
-            <a:endParaRPr lang="en-US"/>
-          </a:p>
-        </p:txBody>
       </p:sp>
       <p:pic>
         <p:nvPicPr>
-          <p:cNvPr id="13" name="Image 2" descr="/home/user/BasicRobotLessons/docs/presentations/v3/template/assets/icons/github_white.png"/>
+          <p:cNvPr id="13" name="Image 2" descr="/home/user/BasicRobotLessons/docs/presentations/v3/template/assets/icons/github_white.png">    </p:cNvPr>
           <p:cNvPicPr>
             <a:picLocks noChangeAspect="1"/>
           </p:cNvPicPr>
           <p:nvPr/>
         </p:nvPicPr>
         <p:blipFill>
-          <a:blip r:embed="rId5"/>
+          <a:blip r:embed="rId3"/>
           <a:stretch>
             <a:fillRect/>
           </a:stretch>
@@ -5237,11 +5294,11 @@
           <a:bodyPr wrap="square" lIns="0" tIns="0" rIns="0" bIns="0" rtlCol="0" anchor="ctr"/>
           <a:lstStyle/>
           <a:p>
-            <a:pPr marL="0" indent="0">
-              <a:buNone/>
-            </a:pPr>
-            <a:r>
-              <a:rPr lang="en-US" sz="2000" b="1" kern="0" spc="50" dirty="0">
+            <a:pPr indent="0" marL="0">
+              <a:buNone/>
+            </a:pPr>
+            <a:r>
+              <a:rPr lang="en-US" sz="2000" b="1" spc="50" kern="0" dirty="0">
                 <a:solidFill>
                   <a:srgbClr val="13294B"/>
                 </a:solidFill>
@@ -5370,11 +5427,11 @@
           <a:bodyPr wrap="square" lIns="0" tIns="0" rIns="0" bIns="0" rtlCol="0" anchor="ctr"/>
           <a:lstStyle/>
           <a:p>
-            <a:pPr marL="0" indent="0">
-              <a:buNone/>
-            </a:pPr>
-            <a:r>
-              <a:rPr lang="en-US" sz="2000" kern="0" spc="100" dirty="0">
+            <a:pPr indent="0" marL="0">
+              <a:buNone/>
+            </a:pPr>
+            <a:r>
+              <a:rPr lang="en-US" sz="2000" spc="100" kern="0" dirty="0">
                 <a:solidFill>
                   <a:srgbClr val="5B6B84"/>
                 </a:solidFill>
@@ -5409,7 +5466,7 @@
           <a:bodyPr wrap="square" lIns="0" tIns="0" rIns="0" bIns="0" rtlCol="0" anchor="ctr"/>
           <a:lstStyle/>
           <a:p>
-            <a:pPr marL="0" indent="0" algn="r">
+            <a:pPr algn="r" indent="0" marL="0">
               <a:buNone/>
             </a:pPr>
             <a:r>
@@ -5429,14 +5486,14 @@
       </p:sp>
       <p:pic>
         <p:nvPicPr>
-          <p:cNvPr id="18" name="Image 3" descr="/home/user/BasicRobotLessons/docs/presentations/v3/template/assets/logo/team5010-logo-onwhite.png"/>
+          <p:cNvPr id="18" name="Image 3" descr="/home/user/BasicRobotLessons/docs/presentations/v3/template/assets/logo/team5010-logo-onwhite.png">    </p:cNvPr>
           <p:cNvPicPr>
             <a:picLocks noChangeAspect="1"/>
           </p:cNvPicPr>
           <p:nvPr/>
         </p:nvPicPr>
         <p:blipFill>
-          <a:blip r:embed="rId6"/>
+          <a:blip r:embed="rId4"/>
           <a:stretch>
             <a:fillRect/>
           </a:stretch>
@@ -5467,7 +5524,6 @@
         <a:solidFill>
           <a:srgbClr val="FFFFFF"/>
         </a:solidFill>
-        <a:effectLst/>
       </p:bgPr>
     </p:bg>
     <p:spTree>
@@ -5503,24 +5559,17 @@
           </a:solidFill>
           <a:ln/>
         </p:spPr>
-        <p:txBody>
-          <a:bodyPr/>
-          <a:lstStyle/>
-          <a:p>
-            <a:endParaRPr lang="en-US"/>
-          </a:p>
-        </p:txBody>
       </p:sp>
       <p:pic>
         <p:nvPicPr>
-          <p:cNvPr id="3" name="Image 0" descr="/home/user/BasicRobotLessons/docs/presentations/v3/template/assets/icons/code_white.png"/>
+          <p:cNvPr id="3" name="Image 0" descr="/home/user/BasicRobotLessons/docs/presentations/v3/template/assets/icons/code_white.png">    </p:cNvPr>
           <p:cNvPicPr>
             <a:picLocks noChangeAspect="1"/>
           </p:cNvPicPr>
           <p:nvPr/>
         </p:nvPicPr>
         <p:blipFill>
-          <a:blip r:embed="rId3"/>
+          <a:blip r:embed="rId1"/>
           <a:stretch>
             <a:fillRect/>
           </a:stretch>
@@ -5556,11 +5605,11 @@
           <a:bodyPr wrap="square" lIns="0" tIns="0" rIns="0" bIns="0" rtlCol="0" anchor="ctr"/>
           <a:lstStyle/>
           <a:p>
-            <a:pPr marL="0" indent="0">
-              <a:buNone/>
-            </a:pPr>
-            <a:r>
-              <a:rPr lang="en-US" sz="2000" b="1" kern="0" spc="150" dirty="0">
+            <a:pPr indent="0" marL="0">
+              <a:buNone/>
+            </a:pPr>
+            <a:r>
+              <a:rPr lang="en-US" sz="2000" b="1" spc="150" kern="0" dirty="0">
                 <a:solidFill>
                   <a:srgbClr val="FF5010"/>
                 </a:solidFill>
@@ -5582,20 +5631,20 @@
         </p:nvSpPr>
         <p:spPr>
           <a:xfrm>
-            <a:off x="1371600" y="749808"/>
-            <a:ext cx="9418320" cy="594360"/>
-          </a:xfrm>
-          <a:prstGeom prst="rect">
-            <a:avLst/>
-          </a:prstGeom>
-          <a:noFill/>
-          <a:ln/>
-        </p:spPr>
-        <p:txBody>
-          <a:bodyPr wrap="square" lIns="0" tIns="0" rIns="0" bIns="0" rtlCol="0" anchor="ctr"/>
-          <a:lstStyle/>
-          <a:p>
-            <a:pPr marL="0" indent="0">
+            <a:off x="1371600" y="818388"/>
+            <a:ext cx="10149840" cy="502920"/>
+          </a:xfrm>
+          <a:prstGeom prst="rect">
+            <a:avLst/>
+          </a:prstGeom>
+          <a:noFill/>
+          <a:ln/>
+        </p:spPr>
+        <p:txBody>
+          <a:bodyPr wrap="square" lIns="0" tIns="0" rIns="0" bIns="0" rtlCol="0" anchor="t"/>
+          <a:lstStyle/>
+          <a:p>
+            <a:pPr indent="0" marL="0">
               <a:buNone/>
             </a:pPr>
             <a:r>
@@ -5632,13 +5681,6 @@
           </a:solidFill>
           <a:ln/>
         </p:spPr>
-        <p:txBody>
-          <a:bodyPr/>
-          <a:lstStyle/>
-          <a:p>
-            <a:endParaRPr lang="en-US"/>
-          </a:p>
-        </p:txBody>
       </p:sp>
       <p:sp>
         <p:nvSpPr>
@@ -5661,7 +5703,7 @@
           <a:bodyPr wrap="square" lIns="0" tIns="0" rIns="0" bIns="0" rtlCol="0" anchor="ctr"/>
           <a:lstStyle/>
           <a:p>
-            <a:pPr marL="0" indent="0" algn="ctr">
+            <a:pPr algn="ctr" indent="0" marL="0">
               <a:buNone/>
             </a:pPr>
             <a:r>
@@ -5700,7 +5742,7 @@
           <a:bodyPr wrap="square" lIns="0" tIns="0" rIns="0" bIns="0" rtlCol="0" anchor="ctr"/>
           <a:lstStyle/>
           <a:p>
-            <a:pPr marL="0" indent="0">
+            <a:pPr indent="0" marL="0">
               <a:buNone/>
             </a:pPr>
             <a:r>
@@ -5739,7 +5781,7 @@
           <a:bodyPr wrap="square" lIns="0" tIns="0" rIns="0" bIns="0" rtlCol="0" anchor="ctr"/>
           <a:lstStyle/>
           <a:p>
-            <a:pPr marL="0" indent="0">
+            <a:pPr indent="0" marL="0">
               <a:lnSpc>
                 <a:spcPct val="110000"/>
               </a:lnSpc>
@@ -5779,13 +5821,6 @@
           </a:solidFill>
           <a:ln/>
         </p:spPr>
-        <p:txBody>
-          <a:bodyPr/>
-          <a:lstStyle/>
-          <a:p>
-            <a:endParaRPr lang="en-US"/>
-          </a:p>
-        </p:txBody>
       </p:sp>
       <p:sp>
         <p:nvSpPr>
@@ -5808,7 +5843,7 @@
           <a:bodyPr wrap="square" lIns="0" tIns="0" rIns="0" bIns="0" rtlCol="0" anchor="ctr"/>
           <a:lstStyle/>
           <a:p>
-            <a:pPr marL="0" indent="0" algn="ctr">
+            <a:pPr algn="ctr" indent="0" marL="0">
               <a:buNone/>
             </a:pPr>
             <a:r>
@@ -5847,7 +5882,7 @@
           <a:bodyPr wrap="square" lIns="0" tIns="0" rIns="0" bIns="0" rtlCol="0" anchor="ctr"/>
           <a:lstStyle/>
           <a:p>
-            <a:pPr marL="0" indent="0">
+            <a:pPr indent="0" marL="0">
               <a:buNone/>
             </a:pPr>
             <a:r>
@@ -5886,7 +5921,7 @@
           <a:bodyPr wrap="square" lIns="0" tIns="0" rIns="0" bIns="0" rtlCol="0" anchor="ctr"/>
           <a:lstStyle/>
           <a:p>
-            <a:pPr marL="0" indent="0">
+            <a:pPr indent="0" marL="0">
               <a:lnSpc>
                 <a:spcPct val="110000"/>
               </a:lnSpc>
@@ -5926,13 +5961,6 @@
           </a:solidFill>
           <a:ln/>
         </p:spPr>
-        <p:txBody>
-          <a:bodyPr/>
-          <a:lstStyle/>
-          <a:p>
-            <a:endParaRPr lang="en-US"/>
-          </a:p>
-        </p:txBody>
       </p:sp>
       <p:sp>
         <p:nvSpPr>
@@ -5955,7 +5983,7 @@
           <a:bodyPr wrap="square" lIns="0" tIns="0" rIns="0" bIns="0" rtlCol="0" anchor="ctr"/>
           <a:lstStyle/>
           <a:p>
-            <a:pPr marL="0" indent="0" algn="ctr">
+            <a:pPr algn="ctr" indent="0" marL="0">
               <a:buNone/>
             </a:pPr>
             <a:r>
@@ -5994,7 +6022,7 @@
           <a:bodyPr wrap="square" lIns="0" tIns="0" rIns="0" bIns="0" rtlCol="0" anchor="ctr"/>
           <a:lstStyle/>
           <a:p>
-            <a:pPr marL="0" indent="0">
+            <a:pPr indent="0" marL="0">
               <a:buNone/>
             </a:pPr>
             <a:r>
@@ -6033,7 +6061,7 @@
           <a:bodyPr wrap="square" lIns="0" tIns="0" rIns="0" bIns="0" rtlCol="0" anchor="ctr"/>
           <a:lstStyle/>
           <a:p>
-            <a:pPr marL="0" indent="0">
+            <a:pPr indent="0" marL="0">
               <a:lnSpc>
                 <a:spcPct val="110000"/>
               </a:lnSpc>
@@ -6073,13 +6101,6 @@
           </a:solidFill>
           <a:ln/>
         </p:spPr>
-        <p:txBody>
-          <a:bodyPr/>
-          <a:lstStyle/>
-          <a:p>
-            <a:endParaRPr lang="en-US"/>
-          </a:p>
-        </p:txBody>
       </p:sp>
       <p:sp>
         <p:nvSpPr>
@@ -6102,7 +6123,7 @@
           <a:bodyPr wrap="square" lIns="0" tIns="0" rIns="0" bIns="0" rtlCol="0" anchor="ctr"/>
           <a:lstStyle/>
           <a:p>
-            <a:pPr marL="0" indent="0" algn="ctr">
+            <a:pPr algn="ctr" indent="0" marL="0">
               <a:buNone/>
             </a:pPr>
             <a:r>
@@ -6141,7 +6162,7 @@
           <a:bodyPr wrap="square" lIns="0" tIns="0" rIns="0" bIns="0" rtlCol="0" anchor="ctr"/>
           <a:lstStyle/>
           <a:p>
-            <a:pPr marL="0" indent="0">
+            <a:pPr indent="0" marL="0">
               <a:buNone/>
             </a:pPr>
             <a:r>
@@ -6180,7 +6201,7 @@
           <a:bodyPr wrap="square" lIns="0" tIns="0" rIns="0" bIns="0" rtlCol="0" anchor="ctr"/>
           <a:lstStyle/>
           <a:p>
-            <a:pPr marL="0" indent="0">
+            <a:pPr indent="0" marL="0">
               <a:lnSpc>
                 <a:spcPct val="110000"/>
               </a:lnSpc>
@@ -6220,13 +6241,6 @@
           </a:solidFill>
           <a:ln/>
         </p:spPr>
-        <p:txBody>
-          <a:bodyPr/>
-          <a:lstStyle/>
-          <a:p>
-            <a:endParaRPr lang="en-US"/>
-          </a:p>
-        </p:txBody>
       </p:sp>
       <p:sp>
         <p:nvSpPr>
@@ -6249,7 +6263,7 @@
           <a:bodyPr wrap="square" lIns="0" tIns="0" rIns="0" bIns="0" rtlCol="0" anchor="ctr"/>
           <a:lstStyle/>
           <a:p>
-            <a:pPr marL="0" indent="0" algn="ctr">
+            <a:pPr algn="ctr" indent="0" marL="0">
               <a:buNone/>
             </a:pPr>
             <a:r>
@@ -6288,7 +6302,7 @@
           <a:bodyPr wrap="square" lIns="0" tIns="0" rIns="0" bIns="0" rtlCol="0" anchor="ctr"/>
           <a:lstStyle/>
           <a:p>
-            <a:pPr marL="0" indent="0">
+            <a:pPr indent="0" marL="0">
               <a:buNone/>
             </a:pPr>
             <a:r>
@@ -6327,7 +6341,7 @@
           <a:bodyPr wrap="square" lIns="0" tIns="0" rIns="0" bIns="0" rtlCol="0" anchor="ctr"/>
           <a:lstStyle/>
           <a:p>
-            <a:pPr marL="0" indent="0">
+            <a:pPr indent="0" marL="0">
               <a:lnSpc>
                 <a:spcPct val="110000"/>
               </a:lnSpc>
@@ -6369,11 +6383,11 @@
           <a:bodyPr wrap="square" lIns="0" tIns="0" rIns="0" bIns="0" rtlCol="0" anchor="ctr"/>
           <a:lstStyle/>
           <a:p>
-            <a:pPr marL="0" indent="0">
-              <a:buNone/>
-            </a:pPr>
-            <a:r>
-              <a:rPr lang="en-US" sz="2000" kern="0" spc="100" dirty="0">
+            <a:pPr indent="0" marL="0">
+              <a:buNone/>
+            </a:pPr>
+            <a:r>
+              <a:rPr lang="en-US" sz="2000" spc="100" kern="0" dirty="0">
                 <a:solidFill>
                   <a:srgbClr val="5B6B84"/>
                 </a:solidFill>
@@ -6408,7 +6422,7 @@
           <a:bodyPr wrap="square" lIns="0" tIns="0" rIns="0" bIns="0" rtlCol="0" anchor="ctr"/>
           <a:lstStyle/>
           <a:p>
-            <a:pPr marL="0" indent="0" algn="r">
+            <a:pPr algn="r" indent="0" marL="0">
               <a:buNone/>
             </a:pPr>
             <a:r>
@@ -6428,14 +6442,14 @@
       </p:sp>
       <p:pic>
         <p:nvPicPr>
-          <p:cNvPr id="28" name="Image 1" descr="/home/user/BasicRobotLessons/docs/presentations/v3/template/assets/logo/team5010-logo-onwhite.png"/>
+          <p:cNvPr id="28" name="Image 1" descr="/home/user/BasicRobotLessons/docs/presentations/v3/template/assets/logo/team5010-logo-onwhite.png">    </p:cNvPr>
           <p:cNvPicPr>
             <a:picLocks noChangeAspect="1"/>
           </p:cNvPicPr>
           <p:nvPr/>
         </p:nvPicPr>
         <p:blipFill>
-          <a:blip r:embed="rId4"/>
+          <a:blip r:embed="rId2"/>
           <a:stretch>
             <a:fillRect/>
           </a:stretch>
@@ -6466,7 +6480,6 @@
         <a:solidFill>
           <a:srgbClr val="FFFFFF"/>
         </a:solidFill>
-        <a:effectLst/>
       </p:bgPr>
     </p:bg>
     <p:spTree>
@@ -6502,24 +6515,17 @@
           </a:solidFill>
           <a:ln/>
         </p:spPr>
-        <p:txBody>
-          <a:bodyPr/>
-          <a:lstStyle/>
-          <a:p>
-            <a:endParaRPr lang="en-US"/>
-          </a:p>
-        </p:txBody>
       </p:sp>
       <p:pic>
         <p:nvPicPr>
-          <p:cNvPr id="3" name="Image 0" descr="/home/user/BasicRobotLessons/docs/presentations/v3/template/assets/icons/download_white.png"/>
+          <p:cNvPr id="3" name="Image 0" descr="/home/user/BasicRobotLessons/docs/presentations/v3/template/assets/icons/download_white.png">    </p:cNvPr>
           <p:cNvPicPr>
             <a:picLocks noChangeAspect="1"/>
           </p:cNvPicPr>
           <p:nvPr/>
         </p:nvPicPr>
         <p:blipFill>
-          <a:blip r:embed="rId3"/>
+          <a:blip r:embed="rId1"/>
           <a:stretch>
             <a:fillRect/>
           </a:stretch>
@@ -6555,11 +6561,11 @@
           <a:bodyPr wrap="square" lIns="0" tIns="0" rIns="0" bIns="0" rtlCol="0" anchor="ctr"/>
           <a:lstStyle/>
           <a:p>
-            <a:pPr marL="0" indent="0">
-              <a:buNone/>
-            </a:pPr>
-            <a:r>
-              <a:rPr lang="en-US" sz="2000" b="1" kern="0" spc="150" dirty="0">
+            <a:pPr indent="0" marL="0">
+              <a:buNone/>
+            </a:pPr>
+            <a:r>
+              <a:rPr lang="en-US" sz="2000" b="1" spc="150" kern="0" dirty="0">
                 <a:solidFill>
                   <a:srgbClr val="FF5010"/>
                 </a:solidFill>
@@ -6581,20 +6587,20 @@
         </p:nvSpPr>
         <p:spPr>
           <a:xfrm>
-            <a:off x="1371600" y="749808"/>
-            <a:ext cx="9418320" cy="594360"/>
-          </a:xfrm>
-          <a:prstGeom prst="rect">
-            <a:avLst/>
-          </a:prstGeom>
-          <a:noFill/>
-          <a:ln/>
-        </p:spPr>
-        <p:txBody>
-          <a:bodyPr wrap="square" lIns="0" tIns="0" rIns="0" bIns="0" rtlCol="0" anchor="ctr"/>
-          <a:lstStyle/>
-          <a:p>
-            <a:pPr marL="0" indent="0">
+            <a:off x="1371600" y="818388"/>
+            <a:ext cx="10149840" cy="502920"/>
+          </a:xfrm>
+          <a:prstGeom prst="rect">
+            <a:avLst/>
+          </a:prstGeom>
+          <a:noFill/>
+          <a:ln/>
+        </p:spPr>
+        <p:txBody>
+          <a:bodyPr wrap="square" lIns="0" tIns="0" rIns="0" bIns="0" rtlCol="0" anchor="t"/>
+          <a:lstStyle/>
+          <a:p>
+            <a:pPr indent="0" marL="0">
               <a:buNone/>
             </a:pPr>
             <a:r>
@@ -6633,20 +6639,13 @@
           </a:solidFill>
           <a:ln/>
           <a:effectLst>
-            <a:outerShdw blurRad="101600" dist="38100" dir="5400000" algn="bl" rotWithShape="0">
+            <a:outerShdw sx="100000" sy="100000" kx="0" ky="0" algn="bl" rotWithShape="0" blurRad="101600" dist="38100" dir="5400000">
               <a:srgbClr val="0B1F3A">
                 <a:alpha val="35000"/>
               </a:srgbClr>
             </a:outerShdw>
           </a:effectLst>
         </p:spPr>
-        <p:txBody>
-          <a:bodyPr/>
-          <a:lstStyle/>
-          <a:p>
-            <a:endParaRPr lang="en-US"/>
-          </a:p>
-        </p:txBody>
       </p:sp>
       <p:sp>
         <p:nvSpPr>
@@ -6667,13 +6666,6 @@
           </a:solidFill>
           <a:ln/>
         </p:spPr>
-        <p:txBody>
-          <a:bodyPr/>
-          <a:lstStyle/>
-          <a:p>
-            <a:endParaRPr lang="en-US"/>
-          </a:p>
-        </p:txBody>
       </p:sp>
       <p:sp>
         <p:nvSpPr>
@@ -6694,13 +6686,6 @@
           </a:solidFill>
           <a:ln/>
         </p:spPr>
-        <p:txBody>
-          <a:bodyPr/>
-          <a:lstStyle/>
-          <a:p>
-            <a:endParaRPr lang="en-US"/>
-          </a:p>
-        </p:txBody>
       </p:sp>
       <p:sp>
         <p:nvSpPr>
@@ -6721,13 +6706,6 @@
           </a:solidFill>
           <a:ln/>
         </p:spPr>
-        <p:txBody>
-          <a:bodyPr/>
-          <a:lstStyle/>
-          <a:p>
-            <a:endParaRPr lang="en-US"/>
-          </a:p>
-        </p:txBody>
       </p:sp>
       <p:sp>
         <p:nvSpPr>
@@ -6750,7 +6728,7 @@
           <a:bodyPr wrap="square" lIns="0" tIns="0" rIns="0" bIns="0" rtlCol="0" anchor="t"/>
           <a:lstStyle/>
           <a:p>
-            <a:pPr marL="0" indent="0">
+            <a:pPr indent="0" marL="0">
               <a:lnSpc>
                 <a:spcPct val="120000"/>
               </a:lnSpc>
@@ -6792,20 +6770,13 @@
           </a:solidFill>
           <a:ln/>
           <a:effectLst>
-            <a:outerShdw blurRad="101600" dist="38100" dir="5400000" algn="bl" rotWithShape="0">
+            <a:outerShdw sx="100000" sy="100000" kx="0" ky="0" algn="bl" rotWithShape="0" blurRad="101600" dist="38100" dir="5400000">
               <a:srgbClr val="0B1F3A">
                 <a:alpha val="35000"/>
               </a:srgbClr>
             </a:outerShdw>
           </a:effectLst>
         </p:spPr>
-        <p:txBody>
-          <a:bodyPr/>
-          <a:lstStyle/>
-          <a:p>
-            <a:endParaRPr lang="en-US"/>
-          </a:p>
-        </p:txBody>
       </p:sp>
       <p:sp>
         <p:nvSpPr>
@@ -6826,13 +6797,6 @@
           </a:solidFill>
           <a:ln/>
         </p:spPr>
-        <p:txBody>
-          <a:bodyPr/>
-          <a:lstStyle/>
-          <a:p>
-            <a:endParaRPr lang="en-US"/>
-          </a:p>
-        </p:txBody>
       </p:sp>
       <p:sp>
         <p:nvSpPr>
@@ -6853,13 +6817,6 @@
           </a:solidFill>
           <a:ln/>
         </p:spPr>
-        <p:txBody>
-          <a:bodyPr/>
-          <a:lstStyle/>
-          <a:p>
-            <a:endParaRPr lang="en-US"/>
-          </a:p>
-        </p:txBody>
       </p:sp>
       <p:sp>
         <p:nvSpPr>
@@ -6880,13 +6837,6 @@
           </a:solidFill>
           <a:ln/>
         </p:spPr>
-        <p:txBody>
-          <a:bodyPr/>
-          <a:lstStyle/>
-          <a:p>
-            <a:endParaRPr lang="en-US"/>
-          </a:p>
-        </p:txBody>
       </p:sp>
       <p:sp>
         <p:nvSpPr>
@@ -6909,7 +6859,7 @@
           <a:bodyPr wrap="square" lIns="0" tIns="0" rIns="0" bIns="0" rtlCol="0" anchor="t"/>
           <a:lstStyle/>
           <a:p>
-            <a:pPr marL="0" indent="0">
+            <a:pPr indent="0" marL="0">
               <a:lnSpc>
                 <a:spcPct val="120000"/>
               </a:lnSpc>
@@ -6929,7 +6879,7 @@
             <a:endParaRPr lang="en-US" sz="2000" dirty="0"/>
           </a:p>
           <a:p>
-            <a:pPr marL="0" indent="0">
+            <a:pPr indent="0" marL="0">
               <a:lnSpc>
                 <a:spcPct val="120000"/>
               </a:lnSpc>
@@ -6971,13 +6921,6 @@
           </a:solidFill>
           <a:ln/>
         </p:spPr>
-        <p:txBody>
-          <a:bodyPr/>
-          <a:lstStyle/>
-          <a:p>
-            <a:endParaRPr lang="en-US"/>
-          </a:p>
-        </p:txBody>
       </p:sp>
       <p:sp>
         <p:nvSpPr>
@@ -7000,7 +6943,7 @@
           <a:bodyPr wrap="square" lIns="0" tIns="0" rIns="0" bIns="0" rtlCol="0" anchor="t"/>
           <a:lstStyle/>
           <a:p>
-            <a:pPr marL="0" indent="0">
+            <a:pPr indent="0" marL="0">
               <a:lnSpc>
                 <a:spcPct val="120000"/>
               </a:lnSpc>
@@ -7042,11 +6985,11 @@
           <a:bodyPr wrap="square" lIns="0" tIns="0" rIns="0" bIns="0" rtlCol="0" anchor="ctr"/>
           <a:lstStyle/>
           <a:p>
-            <a:pPr marL="0" indent="0">
-              <a:buNone/>
-            </a:pPr>
-            <a:r>
-              <a:rPr lang="en-US" sz="2000" kern="0" spc="100" dirty="0">
+            <a:pPr indent="0" marL="0">
+              <a:buNone/>
+            </a:pPr>
+            <a:r>
+              <a:rPr lang="en-US" sz="2000" spc="100" kern="0" dirty="0">
                 <a:solidFill>
                   <a:srgbClr val="5B6B84"/>
                 </a:solidFill>
@@ -7081,7 +7024,7 @@
           <a:bodyPr wrap="square" lIns="0" tIns="0" rIns="0" bIns="0" rtlCol="0" anchor="ctr"/>
           <a:lstStyle/>
           <a:p>
-            <a:pPr marL="0" indent="0" algn="r">
+            <a:pPr algn="r" indent="0" marL="0">
               <a:buNone/>
             </a:pPr>
             <a:r>
@@ -7101,14 +7044,14 @@
       </p:sp>
       <p:pic>
         <p:nvPicPr>
-          <p:cNvPr id="20" name="Image 1" descr="/home/user/BasicRobotLessons/docs/presentations/v3/template/assets/logo/team5010-logo-onwhite.png"/>
+          <p:cNvPr id="20" name="Image 1" descr="/home/user/BasicRobotLessons/docs/presentations/v3/template/assets/logo/team5010-logo-onwhite.png">    </p:cNvPr>
           <p:cNvPicPr>
             <a:picLocks noChangeAspect="1"/>
           </p:cNvPicPr>
           <p:nvPr/>
         </p:nvPicPr>
         <p:blipFill>
-          <a:blip r:embed="rId4"/>
+          <a:blip r:embed="rId2"/>
           <a:stretch>
             <a:fillRect/>
           </a:stretch>
@@ -7139,7 +7082,6 @@
         <a:solidFill>
           <a:srgbClr val="FFFFFF"/>
         </a:solidFill>
-        <a:effectLst/>
       </p:bgPr>
     </p:bg>
     <p:spTree>
@@ -7175,24 +7117,17 @@
           </a:solidFill>
           <a:ln/>
         </p:spPr>
-        <p:txBody>
-          <a:bodyPr/>
-          <a:lstStyle/>
-          <a:p>
-            <a:endParaRPr lang="en-US"/>
-          </a:p>
-        </p:txBody>
       </p:sp>
       <p:pic>
         <p:nvPicPr>
-          <p:cNvPr id="3" name="Image 0" descr="/home/user/BasicRobotLessons/docs/presentations/v3/template/assets/icons/coffee_white.png"/>
+          <p:cNvPr id="3" name="Image 0" descr="/home/user/BasicRobotLessons/docs/presentations/v3/template/assets/icons/coffee_white.png">    </p:cNvPr>
           <p:cNvPicPr>
             <a:picLocks noChangeAspect="1"/>
           </p:cNvPicPr>
           <p:nvPr/>
         </p:nvPicPr>
         <p:blipFill>
-          <a:blip r:embed="rId3"/>
+          <a:blip r:embed="rId1"/>
           <a:stretch>
             <a:fillRect/>
           </a:stretch>
@@ -7228,11 +7163,11 @@
           <a:bodyPr wrap="square" lIns="0" tIns="0" rIns="0" bIns="0" rtlCol="0" anchor="ctr"/>
           <a:lstStyle/>
           <a:p>
-            <a:pPr marL="0" indent="0">
-              <a:buNone/>
-            </a:pPr>
-            <a:r>
-              <a:rPr lang="en-US" sz="2000" b="1" kern="0" spc="150" dirty="0">
+            <a:pPr indent="0" marL="0">
+              <a:buNone/>
+            </a:pPr>
+            <a:r>
+              <a:rPr lang="en-US" sz="2000" b="1" spc="150" kern="0" dirty="0">
                 <a:solidFill>
                   <a:srgbClr val="FF5010"/>
                 </a:solidFill>
@@ -7254,20 +7189,20 @@
         </p:nvSpPr>
         <p:spPr>
           <a:xfrm>
-            <a:off x="1371600" y="749808"/>
-            <a:ext cx="9418320" cy="594360"/>
-          </a:xfrm>
-          <a:prstGeom prst="rect">
-            <a:avLst/>
-          </a:prstGeom>
-          <a:noFill/>
-          <a:ln/>
-        </p:spPr>
-        <p:txBody>
-          <a:bodyPr wrap="square" lIns="0" tIns="0" rIns="0" bIns="0" rtlCol="0" anchor="ctr"/>
-          <a:lstStyle/>
-          <a:p>
-            <a:pPr marL="0" indent="0">
+            <a:off x="1371600" y="818388"/>
+            <a:ext cx="10149840" cy="502920"/>
+          </a:xfrm>
+          <a:prstGeom prst="rect">
+            <a:avLst/>
+          </a:prstGeom>
+          <a:noFill/>
+          <a:ln/>
+        </p:spPr>
+        <p:txBody>
+          <a:bodyPr wrap="square" lIns="0" tIns="0" rIns="0" bIns="0" rtlCol="0" anchor="t"/>
+          <a:lstStyle/>
+          <a:p>
+            <a:pPr indent="0" marL="0">
               <a:buNone/>
             </a:pPr>
             <a:r>
@@ -7306,20 +7241,13 @@
           </a:solidFill>
           <a:ln/>
           <a:effectLst>
-            <a:outerShdw blurRad="101600" dist="38100" dir="5400000" algn="bl" rotWithShape="0">
+            <a:outerShdw sx="100000" sy="100000" kx="0" ky="0" algn="bl" rotWithShape="0" blurRad="101600" dist="38100" dir="5400000">
               <a:srgbClr val="0B1F3A">
                 <a:alpha val="35000"/>
               </a:srgbClr>
             </a:outerShdw>
           </a:effectLst>
         </p:spPr>
-        <p:txBody>
-          <a:bodyPr/>
-          <a:lstStyle/>
-          <a:p>
-            <a:endParaRPr lang="en-US"/>
-          </a:p>
-        </p:txBody>
       </p:sp>
       <p:sp>
         <p:nvSpPr>
@@ -7340,13 +7268,6 @@
           </a:solidFill>
           <a:ln/>
         </p:spPr>
-        <p:txBody>
-          <a:bodyPr/>
-          <a:lstStyle/>
-          <a:p>
-            <a:endParaRPr lang="en-US"/>
-          </a:p>
-        </p:txBody>
       </p:sp>
       <p:sp>
         <p:nvSpPr>
@@ -7367,13 +7288,6 @@
           </a:solidFill>
           <a:ln/>
         </p:spPr>
-        <p:txBody>
-          <a:bodyPr/>
-          <a:lstStyle/>
-          <a:p>
-            <a:endParaRPr lang="en-US"/>
-          </a:p>
-        </p:txBody>
       </p:sp>
       <p:sp>
         <p:nvSpPr>
@@ -7394,13 +7308,6 @@
           </a:solidFill>
           <a:ln/>
         </p:spPr>
-        <p:txBody>
-          <a:bodyPr/>
-          <a:lstStyle/>
-          <a:p>
-            <a:endParaRPr lang="en-US"/>
-          </a:p>
-        </p:txBody>
       </p:sp>
       <p:sp>
         <p:nvSpPr>
@@ -7423,7 +7330,7 @@
           <a:bodyPr wrap="square" lIns="0" tIns="0" rIns="0" bIns="0" rtlCol="0" anchor="t"/>
           <a:lstStyle/>
           <a:p>
-            <a:pPr marL="0" indent="0">
+            <a:pPr indent="0" marL="0">
               <a:lnSpc>
                 <a:spcPct val="120000"/>
               </a:lnSpc>
@@ -7465,7 +7372,7 @@
           <a:bodyPr wrap="square" lIns="0" tIns="0" rIns="0" bIns="0" rtlCol="0" anchor="t"/>
           <a:lstStyle/>
           <a:p>
-            <a:pPr marL="0" indent="0">
+            <a:pPr indent="0" marL="0">
               <a:lnSpc>
                 <a:spcPct val="125000"/>
               </a:lnSpc>
@@ -7507,13 +7414,6 @@
           </a:solidFill>
           <a:ln/>
         </p:spPr>
-        <p:txBody>
-          <a:bodyPr/>
-          <a:lstStyle/>
-          <a:p>
-            <a:endParaRPr lang="en-US"/>
-          </a:p>
-        </p:txBody>
       </p:sp>
       <p:sp>
         <p:nvSpPr>
@@ -7536,11 +7436,11 @@
           <a:bodyPr wrap="square" lIns="0" tIns="0" rIns="0" bIns="0" rtlCol="0" anchor="ctr"/>
           <a:lstStyle/>
           <a:p>
-            <a:pPr marL="0" indent="0">
-              <a:buNone/>
-            </a:pPr>
-            <a:r>
-              <a:rPr lang="en-US" sz="2000" b="1" kern="0" spc="50" dirty="0">
+            <a:pPr indent="0" marL="0">
+              <a:buNone/>
+            </a:pPr>
+            <a:r>
+              <a:rPr lang="en-US" sz="2000" b="1" spc="50" kern="0" dirty="0">
                 <a:solidFill>
                   <a:srgbClr val="FF5010"/>
                 </a:solidFill>
@@ -7575,7 +7475,7 @@
           <a:bodyPr wrap="square" lIns="0" tIns="0" rIns="0" bIns="0" rtlCol="0" anchor="t"/>
           <a:lstStyle/>
           <a:p>
-            <a:pPr marL="0" indent="0">
+            <a:pPr indent="0" marL="0">
               <a:lnSpc>
                 <a:spcPct val="120000"/>
               </a:lnSpc>
@@ -7617,7 +7517,7 @@
           <a:bodyPr wrap="square" lIns="0" tIns="0" rIns="0" bIns="0" rtlCol="0" anchor="t"/>
           <a:lstStyle/>
           <a:p>
-            <a:pPr marL="0" indent="0">
+            <a:pPr indent="0" marL="0">
               <a:lnSpc>
                 <a:spcPct val="125000"/>
               </a:lnSpc>
@@ -7659,11 +7559,11 @@
           <a:bodyPr wrap="square" lIns="0" tIns="0" rIns="0" bIns="0" rtlCol="0" anchor="ctr"/>
           <a:lstStyle/>
           <a:p>
-            <a:pPr marL="0" indent="0">
-              <a:buNone/>
-            </a:pPr>
-            <a:r>
-              <a:rPr lang="en-US" sz="2000" kern="0" spc="100" dirty="0">
+            <a:pPr indent="0" marL="0">
+              <a:buNone/>
+            </a:pPr>
+            <a:r>
+              <a:rPr lang="en-US" sz="2000" spc="100" kern="0" dirty="0">
                 <a:solidFill>
                   <a:srgbClr val="5B6B84"/>
                 </a:solidFill>
@@ -7698,7 +7598,7 @@
           <a:bodyPr wrap="square" lIns="0" tIns="0" rIns="0" bIns="0" rtlCol="0" anchor="ctr"/>
           <a:lstStyle/>
           <a:p>
-            <a:pPr marL="0" indent="0" algn="r">
+            <a:pPr algn="r" indent="0" marL="0">
               <a:buNone/>
             </a:pPr>
             <a:r>
@@ -7718,14 +7618,14 @@
       </p:sp>
       <p:pic>
         <p:nvPicPr>
-          <p:cNvPr id="18" name="Image 1" descr="/home/user/BasicRobotLessons/docs/presentations/v3/template/assets/logo/team5010-logo-onwhite.png"/>
+          <p:cNvPr id="18" name="Image 1" descr="/home/user/BasicRobotLessons/docs/presentations/v3/template/assets/logo/team5010-logo-onwhite.png">    </p:cNvPr>
           <p:cNvPicPr>
             <a:picLocks noChangeAspect="1"/>
           </p:cNvPicPr>
           <p:nvPr/>
         </p:nvPicPr>
         <p:blipFill>
-          <a:blip r:embed="rId4"/>
+          <a:blip r:embed="rId2"/>
           <a:stretch>
             <a:fillRect/>
           </a:stretch>
@@ -7756,7 +7656,6 @@
         <a:solidFill>
           <a:srgbClr val="FFFFFF"/>
         </a:solidFill>
-        <a:effectLst/>
       </p:bgPr>
     </p:bg>
     <p:spTree>
@@ -7792,24 +7691,17 @@
           </a:solidFill>
           <a:ln/>
         </p:spPr>
-        <p:txBody>
-          <a:bodyPr/>
-          <a:lstStyle/>
-          <a:p>
-            <a:endParaRPr lang="en-US"/>
-          </a:p>
-        </p:txBody>
       </p:sp>
       <p:pic>
         <p:nvPicPr>
-          <p:cNvPr id="3" name="Image 0" descr="/home/user/BasicRobotLessons/docs/presentations/v3/template/assets/icons/folderopen_white.png"/>
+          <p:cNvPr id="3" name="Image 0" descr="/home/user/BasicRobotLessons/docs/presentations/v3/template/assets/icons/folderopen_white.png">    </p:cNvPr>
           <p:cNvPicPr>
             <a:picLocks noChangeAspect="1"/>
           </p:cNvPicPr>
           <p:nvPr/>
         </p:nvPicPr>
         <p:blipFill>
-          <a:blip r:embed="rId3"/>
+          <a:blip r:embed="rId1"/>
           <a:stretch>
             <a:fillRect/>
           </a:stretch>
@@ -7845,11 +7737,11 @@
           <a:bodyPr wrap="square" lIns="0" tIns="0" rIns="0" bIns="0" rtlCol="0" anchor="ctr"/>
           <a:lstStyle/>
           <a:p>
-            <a:pPr marL="0" indent="0">
-              <a:buNone/>
-            </a:pPr>
-            <a:r>
-              <a:rPr lang="en-US" sz="2000" b="1" kern="0" spc="150" dirty="0">
+            <a:pPr indent="0" marL="0">
+              <a:buNone/>
+            </a:pPr>
+            <a:r>
+              <a:rPr lang="en-US" sz="2000" b="1" spc="150" kern="0" dirty="0">
                 <a:solidFill>
                   <a:srgbClr val="FF5010"/>
                 </a:solidFill>
@@ -7871,20 +7763,20 @@
         </p:nvSpPr>
         <p:spPr>
           <a:xfrm>
-            <a:off x="1371600" y="749808"/>
-            <a:ext cx="9418320" cy="594360"/>
-          </a:xfrm>
-          <a:prstGeom prst="rect">
-            <a:avLst/>
-          </a:prstGeom>
-          <a:noFill/>
-          <a:ln/>
-        </p:spPr>
-        <p:txBody>
-          <a:bodyPr wrap="square" lIns="0" tIns="0" rIns="0" bIns="0" rtlCol="0" anchor="ctr"/>
-          <a:lstStyle/>
-          <a:p>
-            <a:pPr marL="0" indent="0">
+            <a:off x="1371600" y="818388"/>
+            <a:ext cx="10149840" cy="502920"/>
+          </a:xfrm>
+          <a:prstGeom prst="rect">
+            <a:avLst/>
+          </a:prstGeom>
+          <a:noFill/>
+          <a:ln/>
+        </p:spPr>
+        <p:txBody>
+          <a:bodyPr wrap="square" lIns="0" tIns="0" rIns="0" bIns="0" rtlCol="0" anchor="t"/>
+          <a:lstStyle/>
+          <a:p>
+            <a:pPr indent="0" marL="0">
               <a:buNone/>
             </a:pPr>
             <a:r>
@@ -7923,20 +7815,13 @@
           </a:solidFill>
           <a:ln/>
           <a:effectLst>
-            <a:outerShdw blurRad="101600" dist="38100" dir="5400000" algn="bl" rotWithShape="0">
+            <a:outerShdw sx="100000" sy="100000" kx="0" ky="0" algn="bl" rotWithShape="0" blurRad="101600" dist="38100" dir="5400000">
               <a:srgbClr val="0B1F3A">
                 <a:alpha val="35000"/>
               </a:srgbClr>
             </a:outerShdw>
           </a:effectLst>
         </p:spPr>
-        <p:txBody>
-          <a:bodyPr/>
-          <a:lstStyle/>
-          <a:p>
-            <a:endParaRPr lang="en-US"/>
-          </a:p>
-        </p:txBody>
       </p:sp>
       <p:sp>
         <p:nvSpPr>
@@ -7957,13 +7842,6 @@
           </a:solidFill>
           <a:ln/>
         </p:spPr>
-        <p:txBody>
-          <a:bodyPr/>
-          <a:lstStyle/>
-          <a:p>
-            <a:endParaRPr lang="en-US"/>
-          </a:p>
-        </p:txBody>
       </p:sp>
       <p:sp>
         <p:nvSpPr>
@@ -7984,13 +7862,6 @@
           </a:solidFill>
           <a:ln/>
         </p:spPr>
-        <p:txBody>
-          <a:bodyPr/>
-          <a:lstStyle/>
-          <a:p>
-            <a:endParaRPr lang="en-US"/>
-          </a:p>
-        </p:txBody>
       </p:sp>
       <p:sp>
         <p:nvSpPr>
@@ -8011,13 +7882,6 @@
           </a:solidFill>
           <a:ln/>
         </p:spPr>
-        <p:txBody>
-          <a:bodyPr/>
-          <a:lstStyle/>
-          <a:p>
-            <a:endParaRPr lang="en-US"/>
-          </a:p>
-        </p:txBody>
       </p:sp>
       <p:sp>
         <p:nvSpPr>
@@ -8040,7 +7904,7 @@
           <a:bodyPr wrap="square" lIns="0" tIns="0" rIns="0" bIns="0" rtlCol="0" anchor="t"/>
           <a:lstStyle/>
           <a:p>
-            <a:pPr marL="0" indent="0">
+            <a:pPr indent="0" marL="0">
               <a:lnSpc>
                 <a:spcPct val="120000"/>
               </a:lnSpc>
@@ -8060,7 +7924,7 @@
             <a:endParaRPr lang="en-US" sz="1800" dirty="0"/>
           </a:p>
           <a:p>
-            <a:pPr marL="0" indent="0">
+            <a:pPr indent="0" marL="0">
               <a:lnSpc>
                 <a:spcPct val="120000"/>
               </a:lnSpc>
@@ -8080,7 +7944,7 @@
             <a:endParaRPr lang="en-US" sz="1800" dirty="0"/>
           </a:p>
           <a:p>
-            <a:pPr marL="0" indent="0">
+            <a:pPr indent="0" marL="0">
               <a:lnSpc>
                 <a:spcPct val="120000"/>
               </a:lnSpc>
@@ -8122,13 +7986,6 @@
           </a:solidFill>
           <a:ln/>
         </p:spPr>
-        <p:txBody>
-          <a:bodyPr/>
-          <a:lstStyle/>
-          <a:p>
-            <a:endParaRPr lang="en-US"/>
-          </a:p>
-        </p:txBody>
       </p:sp>
       <p:sp>
         <p:nvSpPr>
@@ -8151,7 +8008,7 @@
           <a:bodyPr wrap="square" lIns="0" tIns="0" rIns="0" bIns="0" rtlCol="0" anchor="t"/>
           <a:lstStyle/>
           <a:p>
-            <a:pPr marL="0" indent="0">
+            <a:pPr indent="0" marL="0">
               <a:lnSpc>
                 <a:spcPct val="125000"/>
               </a:lnSpc>
@@ -8193,13 +8050,6 @@
           </a:solidFill>
           <a:ln/>
         </p:spPr>
-        <p:txBody>
-          <a:bodyPr/>
-          <a:lstStyle/>
-          <a:p>
-            <a:endParaRPr lang="en-US"/>
-          </a:p>
-        </p:txBody>
       </p:sp>
       <p:sp>
         <p:nvSpPr>
@@ -8222,14 +8072,14 @@
           <a:bodyPr wrap="square" lIns="0" tIns="0" rIns="0" bIns="0" rtlCol="0" anchor="t"/>
           <a:lstStyle/>
           <a:p>
-            <a:pPr marL="0" indent="0">
+            <a:pPr indent="0" marL="0">
               <a:lnSpc>
                 <a:spcPct val="115000"/>
               </a:lnSpc>
               <a:buNone/>
             </a:pPr>
             <a:r>
-              <a:rPr lang="en-US" sz="2000" b="1" kern="0" spc="30" dirty="0">
+              <a:rPr lang="en-US" sz="2000" b="1" spc="30" kern="0" dirty="0">
                 <a:solidFill>
                   <a:srgbClr val="FFFFFF"/>
                 </a:solidFill>
@@ -8264,7 +8114,7 @@
           <a:bodyPr wrap="square" lIns="0" tIns="0" rIns="0" bIns="0" rtlCol="0" anchor="t"/>
           <a:lstStyle/>
           <a:p>
-            <a:pPr marL="0" indent="0">
+            <a:pPr indent="0" marL="0">
               <a:lnSpc>
                 <a:spcPct val="120000"/>
               </a:lnSpc>
@@ -8306,11 +8156,11 @@
           <a:bodyPr wrap="square" lIns="0" tIns="0" rIns="0" bIns="0" rtlCol="0" anchor="ctr"/>
           <a:lstStyle/>
           <a:p>
-            <a:pPr marL="0" indent="0">
-              <a:buNone/>
-            </a:pPr>
-            <a:r>
-              <a:rPr lang="en-US" sz="2000" kern="0" spc="100" dirty="0">
+            <a:pPr indent="0" marL="0">
+              <a:buNone/>
+            </a:pPr>
+            <a:r>
+              <a:rPr lang="en-US" sz="2000" spc="100" kern="0" dirty="0">
                 <a:solidFill>
                   <a:srgbClr val="5B6B84"/>
                 </a:solidFill>
@@ -8345,7 +8195,7 @@
           <a:bodyPr wrap="square" lIns="0" tIns="0" rIns="0" bIns="0" rtlCol="0" anchor="ctr"/>
           <a:lstStyle/>
           <a:p>
-            <a:pPr marL="0" indent="0" algn="r">
+            <a:pPr algn="r" indent="0" marL="0">
               <a:buNone/>
             </a:pPr>
             <a:r>
@@ -8365,14 +8215,14 @@
       </p:sp>
       <p:pic>
         <p:nvPicPr>
-          <p:cNvPr id="18" name="Image 1" descr="/home/user/BasicRobotLessons/docs/presentations/v3/template/assets/logo/team5010-logo-onwhite.png"/>
+          <p:cNvPr id="18" name="Image 1" descr="/home/user/BasicRobotLessons/docs/presentations/v3/template/assets/logo/team5010-logo-onwhite.png">    </p:cNvPr>
           <p:cNvPicPr>
             <a:picLocks noChangeAspect="1"/>
           </p:cNvPicPr>
           <p:nvPr/>
         </p:nvPicPr>
         <p:blipFill>
-          <a:blip r:embed="rId4"/>
+          <a:blip r:embed="rId2"/>
           <a:stretch>
             <a:fillRect/>
           </a:stretch>
@@ -8403,7 +8253,6 @@
         <a:solidFill>
           <a:srgbClr val="FFFFFF"/>
         </a:solidFill>
-        <a:effectLst/>
       </p:bgPr>
     </p:bg>
     <p:spTree>
@@ -8439,24 +8288,17 @@
           </a:solidFill>
           <a:ln/>
         </p:spPr>
-        <p:txBody>
-          <a:bodyPr/>
-          <a:lstStyle/>
-          <a:p>
-            <a:endParaRPr lang="en-US"/>
-          </a:p>
-        </p:txBody>
       </p:sp>
       <p:pic>
         <p:nvPicPr>
-          <p:cNvPr id="3" name="Image 0" descr="/home/user/BasicRobotLessons/docs/presentations/v3/template/assets/icons/sitemap_white.png"/>
+          <p:cNvPr id="3" name="Image 0" descr="/home/user/BasicRobotLessons/docs/presentations/v3/template/assets/icons/sitemap_white.png">    </p:cNvPr>
           <p:cNvPicPr>
             <a:picLocks noChangeAspect="1"/>
           </p:cNvPicPr>
           <p:nvPr/>
         </p:nvPicPr>
         <p:blipFill>
-          <a:blip r:embed="rId3"/>
+          <a:blip r:embed="rId1"/>
           <a:stretch>
             <a:fillRect/>
           </a:stretch>
@@ -8492,11 +8334,11 @@
           <a:bodyPr wrap="square" lIns="0" tIns="0" rIns="0" bIns="0" rtlCol="0" anchor="ctr"/>
           <a:lstStyle/>
           <a:p>
-            <a:pPr marL="0" indent="0">
-              <a:buNone/>
-            </a:pPr>
-            <a:r>
-              <a:rPr lang="en-US" sz="2000" b="1" kern="0" spc="150" dirty="0">
+            <a:pPr indent="0" marL="0">
+              <a:buNone/>
+            </a:pPr>
+            <a:r>
+              <a:rPr lang="en-US" sz="2000" b="1" spc="150" kern="0" dirty="0">
                 <a:solidFill>
                   <a:srgbClr val="FF5010"/>
                 </a:solidFill>
@@ -8518,20 +8360,20 @@
         </p:nvSpPr>
         <p:spPr>
           <a:xfrm>
-            <a:off x="1371600" y="749808"/>
-            <a:ext cx="9418320" cy="594360"/>
-          </a:xfrm>
-          <a:prstGeom prst="rect">
-            <a:avLst/>
-          </a:prstGeom>
-          <a:noFill/>
-          <a:ln/>
-        </p:spPr>
-        <p:txBody>
-          <a:bodyPr wrap="square" lIns="0" tIns="0" rIns="0" bIns="0" rtlCol="0" anchor="ctr"/>
-          <a:lstStyle/>
-          <a:p>
-            <a:pPr marL="0" indent="0">
+            <a:off x="1371600" y="818388"/>
+            <a:ext cx="10149840" cy="502920"/>
+          </a:xfrm>
+          <a:prstGeom prst="rect">
+            <a:avLst/>
+          </a:prstGeom>
+          <a:noFill/>
+          <a:ln/>
+        </p:spPr>
+        <p:txBody>
+          <a:bodyPr wrap="square" lIns="0" tIns="0" rIns="0" bIns="0" rtlCol="0" anchor="t"/>
+          <a:lstStyle/>
+          <a:p>
+            <a:pPr indent="0" marL="0">
               <a:buNone/>
             </a:pPr>
             <a:r>
@@ -8570,13 +8412,6 @@
           </a:solidFill>
           <a:ln/>
         </p:spPr>
-        <p:txBody>
-          <a:bodyPr/>
-          <a:lstStyle/>
-          <a:p>
-            <a:endParaRPr lang="en-US"/>
-          </a:p>
-        </p:txBody>
       </p:sp>
       <p:sp>
         <p:nvSpPr>
@@ -8599,11 +8434,11 @@
           <a:bodyPr wrap="square" lIns="0" tIns="0" rIns="0" bIns="0" rtlCol="0" anchor="ctr"/>
           <a:lstStyle/>
           <a:p>
-            <a:pPr marL="0" indent="0">
-              <a:buNone/>
-            </a:pPr>
-            <a:r>
-              <a:rPr lang="en-US" sz="2000" b="1" kern="0" spc="50" dirty="0">
+            <a:pPr indent="0" marL="0">
+              <a:buNone/>
+            </a:pPr>
+            <a:r>
+              <a:rPr lang="en-US" sz="2000" b="1" spc="50" kern="0" dirty="0">
                 <a:solidFill>
                   <a:srgbClr val="FF5010"/>
                 </a:solidFill>
@@ -8638,7 +8473,7 @@
           <a:bodyPr wrap="square" lIns="0" tIns="0" rIns="0" bIns="0" rtlCol="0" anchor="t"/>
           <a:lstStyle/>
           <a:p>
-            <a:pPr marL="0" indent="0">
+            <a:pPr indent="0" marL="0">
               <a:lnSpc>
                 <a:spcPct val="120000"/>
               </a:lnSpc>
@@ -8680,7 +8515,7 @@
           <a:bodyPr wrap="square" lIns="0" tIns="0" rIns="0" bIns="0" rtlCol="0" anchor="t"/>
           <a:lstStyle/>
           <a:p>
-            <a:pPr marL="0" indent="0">
+            <a:pPr indent="0" marL="0">
               <a:lnSpc>
                 <a:spcPct val="125000"/>
               </a:lnSpc>
@@ -8722,13 +8557,6 @@
           </a:solidFill>
           <a:ln/>
         </p:spPr>
-        <p:txBody>
-          <a:bodyPr/>
-          <a:lstStyle/>
-          <a:p>
-            <a:endParaRPr lang="en-US"/>
-          </a:p>
-        </p:txBody>
       </p:sp>
       <p:sp>
         <p:nvSpPr>
@@ -8751,11 +8579,11 @@
           <a:bodyPr wrap="square" lIns="0" tIns="0" rIns="0" bIns="0" rtlCol="0" anchor="ctr"/>
           <a:lstStyle/>
           <a:p>
-            <a:pPr marL="0" indent="0">
-              <a:buNone/>
-            </a:pPr>
-            <a:r>
-              <a:rPr lang="en-US" sz="2000" b="1" kern="0" spc="50" dirty="0">
+            <a:pPr indent="0" marL="0">
+              <a:buNone/>
+            </a:pPr>
+            <a:r>
+              <a:rPr lang="en-US" sz="2000" b="1" spc="50" kern="0" dirty="0">
                 <a:solidFill>
                   <a:srgbClr val="1B9AAA"/>
                 </a:solidFill>
@@ -8790,7 +8618,7 @@
           <a:bodyPr wrap="square" lIns="0" tIns="0" rIns="0" bIns="0" rtlCol="0" anchor="t"/>
           <a:lstStyle/>
           <a:p>
-            <a:pPr marL="0" indent="0">
+            <a:pPr indent="0" marL="0">
               <a:lnSpc>
                 <a:spcPct val="120000"/>
               </a:lnSpc>
@@ -8832,7 +8660,7 @@
           <a:bodyPr wrap="square" lIns="0" tIns="0" rIns="0" bIns="0" rtlCol="0" anchor="t"/>
           <a:lstStyle/>
           <a:p>
-            <a:pPr marL="0" indent="0">
+            <a:pPr indent="0" marL="0">
               <a:lnSpc>
                 <a:spcPct val="125000"/>
               </a:lnSpc>
@@ -8874,11 +8702,11 @@
           <a:bodyPr wrap="square" lIns="0" tIns="0" rIns="0" bIns="0" rtlCol="0" anchor="ctr"/>
           <a:lstStyle/>
           <a:p>
-            <a:pPr marL="0" indent="0">
-              <a:buNone/>
-            </a:pPr>
-            <a:r>
-              <a:rPr lang="en-US" sz="2000" kern="0" spc="100" dirty="0">
+            <a:pPr indent="0" marL="0">
+              <a:buNone/>
+            </a:pPr>
+            <a:r>
+              <a:rPr lang="en-US" sz="2000" spc="100" kern="0" dirty="0">
                 <a:solidFill>
                   <a:srgbClr val="5B6B84"/>
                 </a:solidFill>
@@ -8913,7 +8741,7 @@
           <a:bodyPr wrap="square" lIns="0" tIns="0" rIns="0" bIns="0" rtlCol="0" anchor="ctr"/>
           <a:lstStyle/>
           <a:p>
-            <a:pPr marL="0" indent="0" algn="r">
+            <a:pPr algn="r" indent="0" marL="0">
               <a:buNone/>
             </a:pPr>
             <a:r>
@@ -8933,14 +8761,14 @@
       </p:sp>
       <p:pic>
         <p:nvPicPr>
-          <p:cNvPr id="16" name="Image 1" descr="/home/user/BasicRobotLessons/docs/presentations/v3/template/assets/logo/team5010-logo-onwhite.png"/>
+          <p:cNvPr id="16" name="Image 1" descr="/home/user/BasicRobotLessons/docs/presentations/v3/template/assets/logo/team5010-logo-onwhite.png">    </p:cNvPr>
           <p:cNvPicPr>
             <a:picLocks noChangeAspect="1"/>
           </p:cNvPicPr>
           <p:nvPr/>
         </p:nvPicPr>
         <p:blipFill>
-          <a:blip r:embed="rId4"/>
+          <a:blip r:embed="rId2"/>
           <a:stretch>
             <a:fillRect/>
           </a:stretch>
@@ -8971,7 +8799,6 @@
         <a:solidFill>
           <a:srgbClr val="FFFFFF"/>
         </a:solidFill>
-        <a:effectLst/>
       </p:bgPr>
     </p:bg>
     <p:spTree>
@@ -9007,24 +8834,17 @@
           </a:solidFill>
           <a:ln/>
         </p:spPr>
-        <p:txBody>
-          <a:bodyPr/>
-          <a:lstStyle/>
-          <a:p>
-            <a:endParaRPr lang="en-US"/>
-          </a:p>
-        </p:txBody>
       </p:sp>
       <p:pic>
         <p:nvPicPr>
-          <p:cNvPr id="3" name="Image 0" descr="/home/user/BasicRobotLessons/docs/presentations/v3/template/assets/icons/checkcircle_white.png"/>
+          <p:cNvPr id="3" name="Image 0" descr="/home/user/BasicRobotLessons/docs/presentations/v3/template/assets/icons/checkcircle_white.png">    </p:cNvPr>
           <p:cNvPicPr>
             <a:picLocks noChangeAspect="1"/>
           </p:cNvPicPr>
           <p:nvPr/>
         </p:nvPicPr>
         <p:blipFill>
-          <a:blip r:embed="rId3"/>
+          <a:blip r:embed="rId1"/>
           <a:stretch>
             <a:fillRect/>
           </a:stretch>
@@ -9060,11 +8880,11 @@
           <a:bodyPr wrap="square" lIns="0" tIns="0" rIns="0" bIns="0" rtlCol="0" anchor="ctr"/>
           <a:lstStyle/>
           <a:p>
-            <a:pPr marL="0" indent="0">
-              <a:buNone/>
-            </a:pPr>
-            <a:r>
-              <a:rPr lang="en-US" sz="2000" b="1" kern="0" spc="150" dirty="0">
+            <a:pPr indent="0" marL="0">
+              <a:buNone/>
+            </a:pPr>
+            <a:r>
+              <a:rPr lang="en-US" sz="2000" b="1" spc="150" kern="0" dirty="0">
                 <a:solidFill>
                   <a:srgbClr val="FF5010"/>
                 </a:solidFill>
@@ -9086,20 +8906,20 @@
         </p:nvSpPr>
         <p:spPr>
           <a:xfrm>
-            <a:off x="1371600" y="749808"/>
-            <a:ext cx="9418320" cy="594360"/>
-          </a:xfrm>
-          <a:prstGeom prst="rect">
-            <a:avLst/>
-          </a:prstGeom>
-          <a:noFill/>
-          <a:ln/>
-        </p:spPr>
-        <p:txBody>
-          <a:bodyPr wrap="square" lIns="0" tIns="0" rIns="0" bIns="0" rtlCol="0" anchor="ctr"/>
-          <a:lstStyle/>
-          <a:p>
-            <a:pPr marL="0" indent="0">
+            <a:off x="1371600" y="818388"/>
+            <a:ext cx="10149840" cy="502920"/>
+          </a:xfrm>
+          <a:prstGeom prst="rect">
+            <a:avLst/>
+          </a:prstGeom>
+          <a:noFill/>
+          <a:ln/>
+        </p:spPr>
+        <p:txBody>
+          <a:bodyPr wrap="square" lIns="0" tIns="0" rIns="0" bIns="0" rtlCol="0" anchor="t"/>
+          <a:lstStyle/>
+          <a:p>
+            <a:pPr indent="0" marL="0">
               <a:buNone/>
             </a:pPr>
             <a:r>
@@ -9138,20 +8958,13 @@
           </a:solidFill>
           <a:ln/>
           <a:effectLst>
-            <a:outerShdw blurRad="101600" dist="38100" dir="5400000" algn="bl" rotWithShape="0">
+            <a:outerShdw sx="100000" sy="100000" kx="0" ky="0" algn="bl" rotWithShape="0" blurRad="101600" dist="38100" dir="5400000">
               <a:srgbClr val="0B1F3A">
                 <a:alpha val="35000"/>
               </a:srgbClr>
             </a:outerShdw>
           </a:effectLst>
         </p:spPr>
-        <p:txBody>
-          <a:bodyPr/>
-          <a:lstStyle/>
-          <a:p>
-            <a:endParaRPr lang="en-US"/>
-          </a:p>
-        </p:txBody>
       </p:sp>
       <p:sp>
         <p:nvSpPr>
@@ -9172,13 +8985,6 @@
           </a:solidFill>
           <a:ln/>
         </p:spPr>
-        <p:txBody>
-          <a:bodyPr/>
-          <a:lstStyle/>
-          <a:p>
-            <a:endParaRPr lang="en-US"/>
-          </a:p>
-        </p:txBody>
       </p:sp>
       <p:sp>
         <p:nvSpPr>
@@ -9199,13 +9005,6 @@
           </a:solidFill>
           <a:ln/>
         </p:spPr>
-        <p:txBody>
-          <a:bodyPr/>
-          <a:lstStyle/>
-          <a:p>
-            <a:endParaRPr lang="en-US"/>
-          </a:p>
-        </p:txBody>
       </p:sp>
       <p:sp>
         <p:nvSpPr>
@@ -9226,13 +9025,6 @@
           </a:solidFill>
           <a:ln/>
         </p:spPr>
-        <p:txBody>
-          <a:bodyPr/>
-          <a:lstStyle/>
-          <a:p>
-            <a:endParaRPr lang="en-US"/>
-          </a:p>
-        </p:txBody>
       </p:sp>
       <p:sp>
         <p:nvSpPr>
@@ -9255,7 +9047,7 @@
           <a:bodyPr wrap="square" lIns="0" tIns="0" rIns="0" bIns="0" rtlCol="0" anchor="t"/>
           <a:lstStyle/>
           <a:p>
-            <a:pPr marL="0" indent="0">
+            <a:pPr indent="0" marL="0">
               <a:lnSpc>
                 <a:spcPct val="120000"/>
               </a:lnSpc>
@@ -9275,7 +9067,7 @@
             <a:endParaRPr lang="en-US" sz="1700" dirty="0"/>
           </a:p>
           <a:p>
-            <a:pPr marL="0" indent="0">
+            <a:pPr indent="0" marL="0">
               <a:lnSpc>
                 <a:spcPct val="120000"/>
               </a:lnSpc>
@@ -9295,7 +9087,7 @@
             <a:endParaRPr lang="en-US" sz="1700" dirty="0"/>
           </a:p>
           <a:p>
-            <a:pPr marL="0" indent="0">
+            <a:pPr indent="0" marL="0">
               <a:lnSpc>
                 <a:spcPct val="120000"/>
               </a:lnSpc>
@@ -9337,20 +9129,13 @@
           </a:solidFill>
           <a:ln/>
           <a:effectLst>
-            <a:outerShdw blurRad="101600" dist="38100" dir="5400000" algn="bl" rotWithShape="0">
+            <a:outerShdw sx="100000" sy="100000" kx="0" ky="0" algn="bl" rotWithShape="0" blurRad="101600" dist="38100" dir="5400000">
               <a:srgbClr val="0B1F3A">
                 <a:alpha val="35000"/>
               </a:srgbClr>
             </a:outerShdw>
           </a:effectLst>
         </p:spPr>
-        <p:txBody>
-          <a:bodyPr/>
-          <a:lstStyle/>
-          <a:p>
-            <a:endParaRPr lang="en-US"/>
-          </a:p>
-        </p:txBody>
       </p:sp>
       <p:sp>
         <p:nvSpPr>
@@ -9371,13 +9156,6 @@
           </a:solidFill>
           <a:ln/>
         </p:spPr>
-        <p:txBody>
-          <a:bodyPr/>
-          <a:lstStyle/>
-          <a:p>
-            <a:endParaRPr lang="en-US"/>
-          </a:p>
-        </p:txBody>
       </p:sp>
       <p:sp>
         <p:nvSpPr>
@@ -9398,13 +9176,6 @@
           </a:solidFill>
           <a:ln/>
         </p:spPr>
-        <p:txBody>
-          <a:bodyPr/>
-          <a:lstStyle/>
-          <a:p>
-            <a:endParaRPr lang="en-US"/>
-          </a:p>
-        </p:txBody>
       </p:sp>
       <p:sp>
         <p:nvSpPr>
@@ -9425,13 +9196,6 @@
           </a:solidFill>
           <a:ln/>
         </p:spPr>
-        <p:txBody>
-          <a:bodyPr/>
-          <a:lstStyle/>
-          <a:p>
-            <a:endParaRPr lang="en-US"/>
-          </a:p>
-        </p:txBody>
       </p:sp>
       <p:sp>
         <p:nvSpPr>
@@ -9454,7 +9218,7 @@
           <a:bodyPr wrap="square" lIns="0" tIns="0" rIns="0" bIns="0" rtlCol="0" anchor="t"/>
           <a:lstStyle/>
           <a:p>
-            <a:pPr marL="0" indent="0">
+            <a:pPr indent="0" marL="0">
               <a:lnSpc>
                 <a:spcPct val="120000"/>
               </a:lnSpc>
@@ -9474,7 +9238,7 @@
             <a:endParaRPr lang="en-US" sz="1700" dirty="0"/>
           </a:p>
           <a:p>
-            <a:pPr marL="0" indent="0">
+            <a:pPr indent="0" marL="0">
               <a:lnSpc>
                 <a:spcPct val="120000"/>
               </a:lnSpc>
@@ -9494,7 +9258,7 @@
             <a:endParaRPr lang="en-US" sz="1700" dirty="0"/>
           </a:p>
           <a:p>
-            <a:pPr marL="0" indent="0">
+            <a:pPr indent="0" marL="0">
               <a:lnSpc>
                 <a:spcPct val="120000"/>
               </a:lnSpc>
@@ -9514,7 +9278,7 @@
             <a:endParaRPr lang="en-US" sz="1700" dirty="0"/>
           </a:p>
           <a:p>
-            <a:pPr marL="0" indent="0">
+            <a:pPr indent="0" marL="0">
               <a:lnSpc>
                 <a:spcPct val="120000"/>
               </a:lnSpc>
@@ -9556,13 +9320,6 @@
           </a:solidFill>
           <a:ln/>
         </p:spPr>
-        <p:txBody>
-          <a:bodyPr/>
-          <a:lstStyle/>
-          <a:p>
-            <a:endParaRPr lang="en-US"/>
-          </a:p>
-        </p:txBody>
       </p:sp>
       <p:sp>
         <p:nvSpPr>
@@ -9585,7 +9342,7 @@
           <a:bodyPr wrap="square" lIns="0" tIns="0" rIns="0" bIns="0" rtlCol="0" anchor="t"/>
           <a:lstStyle/>
           <a:p>
-            <a:pPr marL="0" indent="0">
+            <a:pPr indent="0" marL="0">
               <a:lnSpc>
                 <a:spcPct val="120000"/>
               </a:lnSpc>
@@ -9627,7 +9384,7 @@
           <a:bodyPr wrap="square" lIns="0" tIns="0" rIns="0" bIns="0" rtlCol="0" anchor="t"/>
           <a:lstStyle/>
           <a:p>
-            <a:pPr marL="0" indent="0">
+            <a:pPr indent="0" marL="0">
               <a:lnSpc>
                 <a:spcPct val="125000"/>
               </a:lnSpc>
@@ -9669,11 +9426,11 @@
           <a:bodyPr wrap="square" lIns="0" tIns="0" rIns="0" bIns="0" rtlCol="0" anchor="ctr"/>
           <a:lstStyle/>
           <a:p>
-            <a:pPr marL="0" indent="0">
-              <a:buNone/>
-            </a:pPr>
-            <a:r>
-              <a:rPr lang="en-US" sz="2000" kern="0" spc="100" dirty="0">
+            <a:pPr indent="0" marL="0">
+              <a:buNone/>
+            </a:pPr>
+            <a:r>
+              <a:rPr lang="en-US" sz="2000" spc="100" kern="0" dirty="0">
                 <a:solidFill>
                   <a:srgbClr val="5B6B84"/>
                 </a:solidFill>
@@ -9708,7 +9465,7 @@
           <a:bodyPr wrap="square" lIns="0" tIns="0" rIns="0" bIns="0" rtlCol="0" anchor="ctr"/>
           <a:lstStyle/>
           <a:p>
-            <a:pPr marL="0" indent="0" algn="r">
+            <a:pPr algn="r" indent="0" marL="0">
               <a:buNone/>
             </a:pPr>
             <a:r>
@@ -9728,14 +9485,14 @@
       </p:sp>
       <p:pic>
         <p:nvPicPr>
-          <p:cNvPr id="21" name="Image 1" descr="/home/user/BasicRobotLessons/docs/presentations/v3/template/assets/logo/team5010-logo-onwhite.png"/>
+          <p:cNvPr id="21" name="Image 1" descr="/home/user/BasicRobotLessons/docs/presentations/v3/template/assets/logo/team5010-logo-onwhite.png">    </p:cNvPr>
           <p:cNvPicPr>
             <a:picLocks noChangeAspect="1"/>
           </p:cNvPicPr>
           <p:nvPr/>
         </p:nvPicPr>
         <p:blipFill>
-          <a:blip r:embed="rId4"/>
+          <a:blip r:embed="rId2"/>
           <a:stretch>
             <a:fillRect/>
           </a:stretch>
@@ -9766,7 +9523,6 @@
         <a:solidFill>
           <a:srgbClr val="FFFFFF"/>
         </a:solidFill>
-        <a:effectLst/>
       </p:bgPr>
     </p:bg>
     <p:spTree>
@@ -9802,24 +9558,17 @@
           </a:solidFill>
           <a:ln/>
         </p:spPr>
-        <p:txBody>
-          <a:bodyPr/>
-          <a:lstStyle/>
-          <a:p>
-            <a:endParaRPr lang="en-US"/>
-          </a:p>
-        </p:txBody>
       </p:sp>
       <p:pic>
         <p:nvPicPr>
-          <p:cNvPr id="3" name="Image 0" descr="/home/user/BasicRobotLessons/docs/presentations/v3/template/assets/icons/key_white.png"/>
+          <p:cNvPr id="3" name="Image 0" descr="/home/user/BasicRobotLessons/docs/presentations/v3/template/assets/icons/key_white.png">    </p:cNvPr>
           <p:cNvPicPr>
             <a:picLocks noChangeAspect="1"/>
           </p:cNvPicPr>
           <p:nvPr/>
         </p:nvPicPr>
         <p:blipFill>
-          <a:blip r:embed="rId3"/>
+          <a:blip r:embed="rId1"/>
           <a:stretch>
             <a:fillRect/>
           </a:stretch>
@@ -9855,11 +9604,11 @@
           <a:bodyPr wrap="square" lIns="0" tIns="0" rIns="0" bIns="0" rtlCol="0" anchor="ctr"/>
           <a:lstStyle/>
           <a:p>
-            <a:pPr marL="0" indent="0">
-              <a:buNone/>
-            </a:pPr>
-            <a:r>
-              <a:rPr lang="en-US" sz="2000" b="1" kern="0" spc="150" dirty="0">
+            <a:pPr indent="0" marL="0">
+              <a:buNone/>
+            </a:pPr>
+            <a:r>
+              <a:rPr lang="en-US" sz="2000" b="1" spc="150" kern="0" dirty="0">
                 <a:solidFill>
                   <a:srgbClr val="FF5010"/>
                 </a:solidFill>
@@ -9881,20 +9630,20 @@
         </p:nvSpPr>
         <p:spPr>
           <a:xfrm>
-            <a:off x="1371600" y="749808"/>
-            <a:ext cx="9418320" cy="594360"/>
-          </a:xfrm>
-          <a:prstGeom prst="rect">
-            <a:avLst/>
-          </a:prstGeom>
-          <a:noFill/>
-          <a:ln/>
-        </p:spPr>
-        <p:txBody>
-          <a:bodyPr wrap="square" lIns="0" tIns="0" rIns="0" bIns="0" rtlCol="0" anchor="ctr"/>
-          <a:lstStyle/>
-          <a:p>
-            <a:pPr marL="0" indent="0">
+            <a:off x="1371600" y="818388"/>
+            <a:ext cx="10149840" cy="502920"/>
+          </a:xfrm>
+          <a:prstGeom prst="rect">
+            <a:avLst/>
+          </a:prstGeom>
+          <a:noFill/>
+          <a:ln/>
+        </p:spPr>
+        <p:txBody>
+          <a:bodyPr wrap="square" lIns="0" tIns="0" rIns="0" bIns="0" rtlCol="0" anchor="t"/>
+          <a:lstStyle/>
+          <a:p>
+            <a:pPr indent="0" marL="0">
               <a:buNone/>
             </a:pPr>
             <a:r>
@@ -9933,20 +9682,13 @@
           </a:solidFill>
           <a:ln/>
           <a:effectLst>
-            <a:outerShdw blurRad="101600" dist="38100" dir="5400000" algn="bl" rotWithShape="0">
+            <a:outerShdw sx="100000" sy="100000" kx="0" ky="0" algn="bl" rotWithShape="0" blurRad="101600" dist="38100" dir="5400000">
               <a:srgbClr val="0B1F3A">
                 <a:alpha val="35000"/>
               </a:srgbClr>
             </a:outerShdw>
           </a:effectLst>
         </p:spPr>
-        <p:txBody>
-          <a:bodyPr/>
-          <a:lstStyle/>
-          <a:p>
-            <a:endParaRPr lang="en-US"/>
-          </a:p>
-        </p:txBody>
       </p:sp>
       <p:sp>
         <p:nvSpPr>
@@ -9967,13 +9709,6 @@
           </a:solidFill>
           <a:ln/>
         </p:spPr>
-        <p:txBody>
-          <a:bodyPr/>
-          <a:lstStyle/>
-          <a:p>
-            <a:endParaRPr lang="en-US"/>
-          </a:p>
-        </p:txBody>
       </p:sp>
       <p:sp>
         <p:nvSpPr>
@@ -9994,13 +9729,6 @@
           </a:solidFill>
           <a:ln/>
         </p:spPr>
-        <p:txBody>
-          <a:bodyPr/>
-          <a:lstStyle/>
-          <a:p>
-            <a:endParaRPr lang="en-US"/>
-          </a:p>
-        </p:txBody>
       </p:sp>
       <p:sp>
         <p:nvSpPr>
@@ -10021,13 +9749,6 @@
           </a:solidFill>
           <a:ln/>
         </p:spPr>
-        <p:txBody>
-          <a:bodyPr/>
-          <a:lstStyle/>
-          <a:p>
-            <a:endParaRPr lang="en-US"/>
-          </a:p>
-        </p:txBody>
       </p:sp>
       <p:sp>
         <p:nvSpPr>
@@ -10050,7 +9771,7 @@
           <a:bodyPr wrap="square" lIns="0" tIns="0" rIns="0" bIns="0" rtlCol="0" anchor="t"/>
           <a:lstStyle/>
           <a:p>
-            <a:pPr marL="0" indent="0">
+            <a:pPr indent="0" marL="0">
               <a:lnSpc>
                 <a:spcPct val="120000"/>
               </a:lnSpc>
@@ -10092,7 +9813,7 @@
           <a:bodyPr wrap="square" lIns="0" tIns="0" rIns="0" bIns="0" rtlCol="0" anchor="t"/>
           <a:lstStyle/>
           <a:p>
-            <a:pPr marL="0" indent="0">
+            <a:pPr indent="0" marL="0">
               <a:lnSpc>
                 <a:spcPct val="125000"/>
               </a:lnSpc>
@@ -10134,13 +9855,6 @@
           </a:solidFill>
           <a:ln/>
         </p:spPr>
-        <p:txBody>
-          <a:bodyPr/>
-          <a:lstStyle/>
-          <a:p>
-            <a:endParaRPr lang="en-US"/>
-          </a:p>
-        </p:txBody>
       </p:sp>
       <p:sp>
         <p:nvSpPr>
@@ -10163,11 +9877,11 @@
           <a:bodyPr wrap="square" lIns="0" tIns="0" rIns="0" bIns="0" rtlCol="0" anchor="ctr"/>
           <a:lstStyle/>
           <a:p>
-            <a:pPr marL="0" indent="0">
-              <a:buNone/>
-            </a:pPr>
-            <a:r>
-              <a:rPr lang="en-US" sz="2000" b="1" kern="0" spc="50" dirty="0">
+            <a:pPr indent="0" marL="0">
+              <a:buNone/>
+            </a:pPr>
+            <a:r>
+              <a:rPr lang="en-US" sz="2000" b="1" spc="50" kern="0" dirty="0">
                 <a:solidFill>
                   <a:srgbClr val="1B9AAA"/>
                 </a:solidFill>
@@ -10202,7 +9916,7 @@
           <a:bodyPr wrap="square" lIns="0" tIns="0" rIns="0" bIns="0" rtlCol="0" anchor="t"/>
           <a:lstStyle/>
           <a:p>
-            <a:pPr marL="0" indent="0">
+            <a:pPr indent="0" marL="0">
               <a:lnSpc>
                 <a:spcPct val="120000"/>
               </a:lnSpc>
@@ -10217,29 +9931,7 @@
                 <a:ea typeface="Cambria" pitchFamily="34" charset="-122"/>
                 <a:cs typeface="Cambria" pitchFamily="34" charset="-120"/>
               </a:rPr>
-              <a:t>https://github.</a:t>
-            </a:r>
-            <a:r>
-              <a:rPr lang="en-US" sz="2100" b="1">
-                <a:solidFill>
-                  <a:srgbClr val="FFFFFF"/>
-                </a:solidFill>
-                <a:latin typeface="Cambria" pitchFamily="34" charset="0"/>
-                <a:ea typeface="Cambria" pitchFamily="34" charset="-122"/>
-                <a:cs typeface="Cambria" pitchFamily="34" charset="-120"/>
-              </a:rPr>
-              <a:t>com → </a:t>
-            </a:r>
-            <a:r>
-              <a:rPr lang="en-US" sz="2100" b="1" dirty="0">
-                <a:solidFill>
-                  <a:srgbClr val="FFFFFF"/>
-                </a:solidFill>
-                <a:latin typeface="Cambria" pitchFamily="34" charset="0"/>
-                <a:ea typeface="Cambria" pitchFamily="34" charset="-122"/>
-                <a:cs typeface="Cambria" pitchFamily="34" charset="-120"/>
-              </a:rPr>
-              <a:t>authenticate Git with your GitHub credentials → log in with a web browser.</a:t>
+              <a:t>GitHub.com → HTTPS → authenticate Git with your GitHub credentials → log in with a web browser.</a:t>
             </a:r>
             <a:endParaRPr lang="en-US" sz="2100" dirty="0"/>
           </a:p>
@@ -10266,7 +9958,7 @@
           <a:bodyPr wrap="square" lIns="0" tIns="0" rIns="0" bIns="0" rtlCol="0" anchor="t"/>
           <a:lstStyle/>
           <a:p>
-            <a:pPr marL="0" indent="0">
+            <a:pPr indent="0" marL="0">
               <a:lnSpc>
                 <a:spcPct val="125000"/>
               </a:lnSpc>
@@ -10308,11 +10000,11 @@
           <a:bodyPr wrap="square" lIns="0" tIns="0" rIns="0" bIns="0" rtlCol="0" anchor="ctr"/>
           <a:lstStyle/>
           <a:p>
-            <a:pPr marL="0" indent="0">
-              <a:buNone/>
-            </a:pPr>
-            <a:r>
-              <a:rPr lang="en-US" sz="2000" kern="0" spc="100" dirty="0">
+            <a:pPr indent="0" marL="0">
+              <a:buNone/>
+            </a:pPr>
+            <a:r>
+              <a:rPr lang="en-US" sz="2000" spc="100" kern="0" dirty="0">
                 <a:solidFill>
                   <a:srgbClr val="5B6B84"/>
                 </a:solidFill>
@@ -10347,7 +10039,7 @@
           <a:bodyPr wrap="square" lIns="0" tIns="0" rIns="0" bIns="0" rtlCol="0" anchor="ctr"/>
           <a:lstStyle/>
           <a:p>
-            <a:pPr marL="0" indent="0" algn="r">
+            <a:pPr algn="r" indent="0" marL="0">
               <a:buNone/>
             </a:pPr>
             <a:r>
@@ -10367,14 +10059,14 @@
       </p:sp>
       <p:pic>
         <p:nvPicPr>
-          <p:cNvPr id="18" name="Image 1" descr="/home/user/BasicRobotLessons/docs/presentations/v3/template/assets/logo/team5010-logo-onwhite.png"/>
+          <p:cNvPr id="18" name="Image 1" descr="/home/user/BasicRobotLessons/docs/presentations/v3/template/assets/logo/team5010-logo-onwhite.png">    </p:cNvPr>
           <p:cNvPicPr>
             <a:picLocks noChangeAspect="1"/>
           </p:cNvPicPr>
           <p:nvPr/>
         </p:nvPicPr>
         <p:blipFill>
-          <a:blip r:embed="rId4"/>
+          <a:blip r:embed="rId2"/>
           <a:stretch>
             <a:fillRect/>
           </a:stretch>
@@ -10690,319 +10382,4 @@
     </a:ext>
   </a:extLst>
 </a:theme>
-</file>
-
-<file path=ppt/theme/theme2.xml><?xml version="1.0" encoding="utf-8"?>
-<a:theme xmlns:a="http://schemas.openxmlformats.org/drawingml/2006/main" name="Office Theme">
-  <a:themeElements>
-    <a:clrScheme name="Office">
-      <a:dk1>
-        <a:sysClr val="windowText" lastClr="000000"/>
-      </a:dk1>
-      <a:lt1>
-        <a:sysClr val="window" lastClr="FFFFFF"/>
-      </a:lt1>
-      <a:dk2>
-        <a:srgbClr val="0E2841"/>
-      </a:dk2>
-      <a:lt2>
-        <a:srgbClr val="E8E8E8"/>
-      </a:lt2>
-      <a:accent1>
-        <a:srgbClr val="156082"/>
-      </a:accent1>
-      <a:accent2>
-        <a:srgbClr val="E97132"/>
-      </a:accent2>
-      <a:accent3>
-        <a:srgbClr val="196B24"/>
-      </a:accent3>
-      <a:accent4>
-        <a:srgbClr val="0F9ED5"/>
-      </a:accent4>
-      <a:accent5>
-        <a:srgbClr val="A02B93"/>
-      </a:accent5>
-      <a:accent6>
-        <a:srgbClr val="4EA72E"/>
-      </a:accent6>
-      <a:hlink>
-        <a:srgbClr val="467886"/>
-      </a:hlink>
-      <a:folHlink>
-        <a:srgbClr val="96607D"/>
-      </a:folHlink>
-    </a:clrScheme>
-    <a:fontScheme name="Office">
-      <a:majorFont>
-        <a:latin typeface="Aptos Display" panose="02110004020202020204"/>
-        <a:ea typeface=""/>
-        <a:cs typeface=""/>
-        <a:font script="Jpan" typeface="游ゴシック Light"/>
-        <a:font script="Hang" typeface="맑은 고딕"/>
-        <a:font script="Hans" typeface="等线 Light"/>
-        <a:font script="Hant" typeface="新細明體"/>
-        <a:font script="Arab" typeface="Times New Roman"/>
-        <a:font script="Hebr" typeface="Times New Roman"/>
-        <a:font script="Thai" typeface="Angsana New"/>
-        <a:font script="Ethi" typeface="Nyala"/>
-        <a:font script="Beng" typeface="Vrinda"/>
-        <a:font script="Gujr" typeface="Shruti"/>
-        <a:font script="Khmr" typeface="MoolBoran"/>
-        <a:font script="Knda" typeface="Tunga"/>
-        <a:font script="Guru" typeface="Raavi"/>
-        <a:font script="Cans" typeface="Euphemia"/>
-        <a:font script="Cher" typeface="Plantagenet Cherokee"/>
-        <a:font script="Yiii" typeface="Microsoft Yi Baiti"/>
-        <a:font script="Tibt" typeface="Microsoft Himalaya"/>
-        <a:font script="Thaa" typeface="MV Boli"/>
-        <a:font script="Deva" typeface="Mangal"/>
-        <a:font script="Telu" typeface="Gautami"/>
-        <a:font script="Taml" typeface="Latha"/>
-        <a:font script="Syrc" typeface="Estrangelo Edessa"/>
-        <a:font script="Orya" typeface="Kalinga"/>
-        <a:font script="Mlym" typeface="Kartika"/>
-        <a:font script="Laoo" typeface="DokChampa"/>
-        <a:font script="Sinh" typeface="Iskoola Pota"/>
-        <a:font script="Mong" typeface="Mongolian Baiti"/>
-        <a:font script="Viet" typeface="Times New Roman"/>
-        <a:font script="Uigh" typeface="Microsoft Uighur"/>
-        <a:font script="Geor" typeface="Sylfaen"/>
-        <a:font script="Armn" typeface="Arial"/>
-        <a:font script="Bugi" typeface="Leelawadee UI"/>
-        <a:font script="Bopo" typeface="Microsoft JhengHei"/>
-        <a:font script="Java" typeface="Javanese Text"/>
-        <a:font script="Lisu" typeface="Segoe UI"/>
-        <a:font script="Mymr" typeface="Myanmar Text"/>
-        <a:font script="Nkoo" typeface="Ebrima"/>
-        <a:font script="Olck" typeface="Nirmala UI"/>
-        <a:font script="Osma" typeface="Ebrima"/>
-        <a:font script="Phag" typeface="Phagspa"/>
-        <a:font script="Syrn" typeface="Estrangelo Edessa"/>
-        <a:font script="Syrj" typeface="Estrangelo Edessa"/>
-        <a:font script="Syre" typeface="Estrangelo Edessa"/>
-        <a:font script="Sora" typeface="Nirmala UI"/>
-        <a:font script="Tale" typeface="Microsoft Tai Le"/>
-        <a:font script="Talu" typeface="Microsoft New Tai Lue"/>
-        <a:font script="Tfng" typeface="Ebrima"/>
-      </a:majorFont>
-      <a:minorFont>
-        <a:latin typeface="Aptos" panose="02110004020202020204"/>
-        <a:ea typeface=""/>
-        <a:cs typeface=""/>
-        <a:font script="Jpan" typeface="游ゴシック"/>
-        <a:font script="Hang" typeface="맑은 고딕"/>
-        <a:font script="Hans" typeface="等线"/>
-        <a:font script="Hant" typeface="新細明體"/>
-        <a:font script="Arab" typeface="Arial"/>
-        <a:font script="Hebr" typeface="Arial"/>
-        <a:font script="Thai" typeface="Cordia New"/>
-        <a:font script="Ethi" typeface="Nyala"/>
-        <a:font script="Beng" typeface="Vrinda"/>
-        <a:font script="Gujr" typeface="Shruti"/>
-        <a:font script="Khmr" typeface="DaunPenh"/>
-        <a:font script="Knda" typeface="Tunga"/>
-        <a:font script="Guru" typeface="Raavi"/>
-        <a:font script="Cans" typeface="Euphemia"/>
-        <a:font script="Cher" typeface="Plantagenet Cherokee"/>
-        <a:font script="Yiii" typeface="Microsoft Yi Baiti"/>
-        <a:font script="Tibt" typeface="Microsoft Himalaya"/>
-        <a:font script="Thaa" typeface="MV Boli"/>
-        <a:font script="Deva" typeface="Mangal"/>
-        <a:font script="Telu" typeface="Gautami"/>
-        <a:font script="Taml" typeface="Latha"/>
-        <a:font script="Syrc" typeface="Estrangelo Edessa"/>
-        <a:font script="Orya" typeface="Kalinga"/>
-        <a:font script="Mlym" typeface="Kartika"/>
-        <a:font script="Laoo" typeface="DokChampa"/>
-        <a:font script="Sinh" typeface="Iskoola Pota"/>
-        <a:font script="Mong" typeface="Mongolian Baiti"/>
-        <a:font script="Viet" typeface="Arial"/>
-        <a:font script="Uigh" typeface="Microsoft Uighur"/>
-        <a:font script="Geor" typeface="Sylfaen"/>
-        <a:font script="Armn" typeface="Arial"/>
-        <a:font script="Bugi" typeface="Leelawadee UI"/>
-        <a:font script="Bopo" typeface="Microsoft JhengHei"/>
-        <a:font script="Java" typeface="Javanese Text"/>
-        <a:font script="Lisu" typeface="Segoe UI"/>
-        <a:font script="Mymr" typeface="Myanmar Text"/>
-        <a:font script="Nkoo" typeface="Ebrima"/>
-        <a:font script="Olck" typeface="Nirmala UI"/>
-        <a:font script="Osma" typeface="Ebrima"/>
-        <a:font script="Phag" typeface="Phagspa"/>
-        <a:font script="Syrn" typeface="Estrangelo Edessa"/>
-        <a:font script="Syrj" typeface="Estrangelo Edessa"/>
-        <a:font script="Syre" typeface="Estrangelo Edessa"/>
-        <a:font script="Sora" typeface="Nirmala UI"/>
-        <a:font script="Tale" typeface="Microsoft Tai Le"/>
-        <a:font script="Talu" typeface="Microsoft New Tai Lue"/>
-        <a:font script="Tfng" typeface="Ebrima"/>
-      </a:minorFont>
-    </a:fontScheme>
-    <a:fmtScheme name="Office">
-      <a:fillStyleLst>
-        <a:solidFill>
-          <a:schemeClr val="phClr"/>
-        </a:solidFill>
-        <a:gradFill rotWithShape="1">
-          <a:gsLst>
-            <a:gs pos="0">
-              <a:schemeClr val="phClr">
-                <a:lumMod val="110000"/>
-                <a:satMod val="105000"/>
-                <a:tint val="67000"/>
-              </a:schemeClr>
-            </a:gs>
-            <a:gs pos="50000">
-              <a:schemeClr val="phClr">
-                <a:lumMod val="105000"/>
-                <a:satMod val="103000"/>
-                <a:tint val="73000"/>
-              </a:schemeClr>
-            </a:gs>
-            <a:gs pos="100000">
-              <a:schemeClr val="phClr">
-                <a:lumMod val="105000"/>
-                <a:satMod val="109000"/>
-                <a:tint val="81000"/>
-              </a:schemeClr>
-            </a:gs>
-          </a:gsLst>
-          <a:lin ang="5400000" scaled="0"/>
-        </a:gradFill>
-        <a:gradFill rotWithShape="1">
-          <a:gsLst>
-            <a:gs pos="0">
-              <a:schemeClr val="phClr">
-                <a:satMod val="103000"/>
-                <a:lumMod val="102000"/>
-                <a:tint val="94000"/>
-              </a:schemeClr>
-            </a:gs>
-            <a:gs pos="50000">
-              <a:schemeClr val="phClr">
-                <a:satMod val="110000"/>
-                <a:lumMod val="100000"/>
-                <a:shade val="100000"/>
-              </a:schemeClr>
-            </a:gs>
-            <a:gs pos="100000">
-              <a:schemeClr val="phClr">
-                <a:lumMod val="99000"/>
-                <a:satMod val="120000"/>
-                <a:shade val="78000"/>
-              </a:schemeClr>
-            </a:gs>
-          </a:gsLst>
-          <a:lin ang="5400000" scaled="0"/>
-        </a:gradFill>
-      </a:fillStyleLst>
-      <a:lnStyleLst>
-        <a:ln w="12700" cap="flat" cmpd="sng" algn="ctr">
-          <a:solidFill>
-            <a:schemeClr val="phClr"/>
-          </a:solidFill>
-          <a:prstDash val="solid"/>
-          <a:miter lim="800000"/>
-        </a:ln>
-        <a:ln w="19050" cap="flat" cmpd="sng" algn="ctr">
-          <a:solidFill>
-            <a:schemeClr val="phClr"/>
-          </a:solidFill>
-          <a:prstDash val="solid"/>
-          <a:miter lim="800000"/>
-        </a:ln>
-        <a:ln w="25400" cap="flat" cmpd="sng" algn="ctr">
-          <a:solidFill>
-            <a:schemeClr val="phClr"/>
-          </a:solidFill>
-          <a:prstDash val="solid"/>
-          <a:miter lim="800000"/>
-        </a:ln>
-      </a:lnStyleLst>
-      <a:effectStyleLst>
-        <a:effectStyle>
-          <a:effectLst/>
-        </a:effectStyle>
-        <a:effectStyle>
-          <a:effectLst/>
-        </a:effectStyle>
-        <a:effectStyle>
-          <a:effectLst>
-            <a:outerShdw blurRad="57150" dist="19050" dir="5400000" algn="ctr" rotWithShape="0">
-              <a:srgbClr val="000000">
-                <a:alpha val="63000"/>
-              </a:srgbClr>
-            </a:outerShdw>
-          </a:effectLst>
-        </a:effectStyle>
-      </a:effectStyleLst>
-      <a:bgFillStyleLst>
-        <a:solidFill>
-          <a:schemeClr val="phClr"/>
-        </a:solidFill>
-        <a:solidFill>
-          <a:schemeClr val="phClr">
-            <a:tint val="95000"/>
-            <a:satMod val="170000"/>
-          </a:schemeClr>
-        </a:solidFill>
-        <a:gradFill rotWithShape="1">
-          <a:gsLst>
-            <a:gs pos="0">
-              <a:schemeClr val="phClr">
-                <a:tint val="93000"/>
-                <a:satMod val="150000"/>
-                <a:shade val="98000"/>
-                <a:lumMod val="102000"/>
-              </a:schemeClr>
-            </a:gs>
-            <a:gs pos="50000">
-              <a:schemeClr val="phClr">
-                <a:tint val="98000"/>
-                <a:satMod val="130000"/>
-                <a:shade val="90000"/>
-                <a:lumMod val="103000"/>
-              </a:schemeClr>
-            </a:gs>
-            <a:gs pos="100000">
-              <a:schemeClr val="phClr">
-                <a:shade val="63000"/>
-                <a:satMod val="120000"/>
-              </a:schemeClr>
-            </a:gs>
-          </a:gsLst>
-          <a:lin ang="5400000" scaled="0"/>
-        </a:gradFill>
-      </a:bgFillStyleLst>
-    </a:fmtScheme>
-  </a:themeElements>
-  <a:objectDefaults>
-    <a:lnDef>
-      <a:spPr/>
-      <a:bodyPr/>
-      <a:lstStyle/>
-      <a:style>
-        <a:lnRef idx="2">
-          <a:schemeClr val="accent1"/>
-        </a:lnRef>
-        <a:fillRef idx="0">
-          <a:schemeClr val="accent1"/>
-        </a:fillRef>
-        <a:effectRef idx="1">
-          <a:schemeClr val="accent1"/>
-        </a:effectRef>
-        <a:fontRef idx="minor">
-          <a:schemeClr val="tx1"/>
-        </a:fontRef>
-      </a:style>
-    </a:lnDef>
-  </a:objectDefaults>
-  <a:extraClrSchemeLst/>
-  <a:extLst>
-    <a:ext uri="{05A4C25C-085E-4340-85A3-A5531E510DB2}">
-      <thm15:themeFamily xmlns:thm15="http://schemas.microsoft.com/office/thememl/2012/main" name="Office Theme" id="{2E142A2C-CD16-42D6-873A-C26D2A0506FA}" vid="{1BDDFF52-6CD6-40A5-AB3C-68EB2F1E4D0A}"/>
-    </a:ext>
-  </a:extLst>
-</a:theme>
 </file>